--- a/Topic_B/Exam_Practice/TB-L10_Speaking_Workshop_Topic_B_Listening_and_Reading_Workshop.pptx
+++ b/Topic_B/Exam_Practice/TB-L10_Speaking_Workshop_Topic_B_Listening_and_Reading_Workshop.pptx
@@ -615,7 +615,11 @@
           <a:lstStyle/>
           <a:p>
             <a:r>
-              <a:rPr lang="en-US" dirty="0"/>
+              <a:rPr lang="ar-SA" dirty="0">
+                <a:latin typeface="Amiri" pitchFamily="2" charset="-78"/>
+                <a:ea typeface="Amiri" pitchFamily="2" charset="-78"/>
+                <a:cs typeface="Amiri" pitchFamily="2" charset="-78"/>
+              </a:rPr>
               <a:t>ROLE PLAY C (Develop) — telling your parent.
 SET-UP IN THE BREAKOUT ROOM: A = examiner (reads the left column ONLY — the questions, in order), B = candidate (sees the task column; Core may use the help column), C = observer (ticks the feedback checklist). 1 minute preparation, about 3 minutes speaking, 1 minute feedback, then rotate.
 Task ! is the unexpected question: in the exam the candidate has not seen it — the examiner should read it without warning.
@@ -707,7 +711,11 @@
           <a:lstStyle/>
           <a:p>
             <a:r>
-              <a:rPr lang="en-US" dirty="0"/>
+              <a:rPr lang="ar-SA" dirty="0">
+                <a:latin typeface="Amiri" pitchFamily="2" charset="-78"/>
+                <a:ea typeface="Amiri" pitchFamily="2" charset="-78"/>
+                <a:cs typeface="Amiri" pitchFamily="2" charset="-78"/>
+              </a:rPr>
               <a:t>ROLE PLAY D (Stretch) — a community radio show.
 SET-UP IN THE BREAKOUT ROOM: A = examiner (reads the left column ONLY — the questions, in order), B = candidate (sees the task column; Core may use the help column), C = observer (ticks the feedback checklist). 1 minute preparation, about 3 minutes speaking, 1 minute feedback, then rotate.
 Task ! is the unexpected question: in the exam the candidate has not seen it — the examiner should read it without warning.
@@ -1243,7 +1251,11 @@
           <a:lstStyle/>
           <a:p>
             <a:r>
-              <a:rPr lang="en-US" dirty="0"/>
+              <a:rPr lang="ar-SA" dirty="0">
+                <a:latin typeface="Amiri" pitchFamily="2" charset="-78"/>
+                <a:ea typeface="Amiri" pitchFamily="2" charset="-78"/>
+                <a:cs typeface="Amiri" pitchFamily="2" charset="-78"/>
+              </a:rPr>
               <a:t>TOPIC CONVERSATION — Core. Examiner asks the questions in order and may add “لِمَاذَا؟ / هَلْ يُمْكِنُ أَنْ تَشْرَحَ أَكْثَرَ؟” to push for more. Candidate aims for one full sentence per question.
 </a:t>
             </a:r>
@@ -1332,7 +1344,11 @@
           <a:lstStyle/>
           <a:p>
             <a:r>
-              <a:rPr lang="en-US" dirty="0"/>
+              <a:rPr lang="ar-SA" dirty="0">
+                <a:latin typeface="Amiri" pitchFamily="2" charset="-78"/>
+                <a:ea typeface="Amiri" pitchFamily="2" charset="-78"/>
+                <a:cs typeface="Amiri" pitchFamily="2" charset="-78"/>
+              </a:rPr>
               <a:t>TOPIC CONVERSATION — Develop. Examiner asks the questions in order and may add “لِمَاذَا؟ / هَلْ يُمْكِنُ أَنْ تَشْرَحَ أَكْثَرَ؟” to push for more. Candidate aims for two or three sentences, mixing Topic B.
 </a:t>
             </a:r>
@@ -1421,7 +1437,11 @@
           <a:lstStyle/>
           <a:p>
             <a:r>
-              <a:rPr lang="en-US" dirty="0"/>
+              <a:rPr lang="ar-SA" dirty="0">
+                <a:latin typeface="Amiri" pitchFamily="2" charset="-78"/>
+                <a:ea typeface="Amiri" pitchFamily="2" charset="-78"/>
+                <a:cs typeface="Amiri" pitchFamily="2" charset="-78"/>
+              </a:rPr>
               <a:t>TOPIC CONVERSATION — Stretch. Examiner asks the questions in order and may add “لِمَاذَا؟ / هَلْ يُمْكِنُ أَنْ تَشْرَحَ أَكْثَرَ؟” to push for more. Candidate aims for a developed answer: opinion, comparison, concession and a conditional.
 </a:t>
             </a:r>
@@ -1510,7 +1530,11 @@
           <a:lstStyle/>
           <a:p>
             <a:r>
-              <a:rPr lang="en-US" dirty="0"/>
+              <a:rPr lang="ar-SA" dirty="0">
+                <a:latin typeface="Amiri" pitchFamily="2" charset="-78"/>
+                <a:ea typeface="Amiri" pitchFamily="2" charset="-78"/>
+                <a:cs typeface="Amiri" pitchFamily="2" charset="-78"/>
+              </a:rPr>
               <a:t>WELCOME (1 min) — while students join.
 • Greet each student by name as they arrive: السَّلَامُ عَلَيْكُمْ. Take the register (Pastoral Tracker: attendance 0/1).
 • 2-MINUTE CHECK-IN (SEND training): a private chat to any student who seemed unsettled last lesson — “Are you okay today? 👍 / 👎”.
@@ -2224,7 +2248,11 @@
           <a:lstStyle/>
           <a:p>
             <a:r>
-              <a:rPr lang="en-US" dirty="0"/>
+              <a:rPr lang="ar-SA" dirty="0">
+                <a:latin typeface="Amiri" pitchFamily="2" charset="-78"/>
+                <a:ea typeface="Amiri" pitchFamily="2" charset="-78"/>
+                <a:cs typeface="Amiri" pitchFamily="2" charset="-78"/>
+              </a:rPr>
               <a:t>TEACH (3 min). Role play = precise and complete; conversation = develop. Choral repetition of the repair phrases. To a girl: تُعِيدِي.</a:t>
             </a:r>
             <a:endParaRPr lang="en-US" dirty="0"/>
@@ -2312,7 +2340,11 @@
           <a:lstStyle/>
           <a:p>
             <a:r>
-              <a:rPr lang="en-US" dirty="0"/>
+              <a:rPr lang="ar-SA" dirty="0">
+                <a:latin typeface="Amiri" pitchFamily="2" charset="-78"/>
+                <a:ea typeface="Amiri" pitchFamily="2" charset="-78"/>
+                <a:cs typeface="Amiri" pitchFamily="2" charset="-78"/>
+              </a:rPr>
               <a:t>LANGUAGE BANK (2 min) — the reading and listening skill: follow the pronouns. عِنْدَهُ (he has) · عِنْدَهَا (she has) · عِنْدَهُمْ (they have). Ask yourself after every -hu / -hā / -hum: who is it?</a:t>
             </a:r>
             <a:endParaRPr lang="en-US" dirty="0"/>
@@ -2400,7 +2432,11 @@
           <a:lstStyle/>
           <a:p>
             <a:r>
-              <a:rPr lang="en-US" dirty="0"/>
+              <a:rPr lang="ar-SA" dirty="0">
+                <a:latin typeface="Amiri" pitchFamily="2" charset="-78"/>
+                <a:ea typeface="Amiri" pitchFamily="2" charset="-78"/>
+                <a:cs typeface="Amiri" pitchFamily="2" charset="-78"/>
+              </a:rPr>
               <a:t>LANGUAGE BANK (2 min) — to a family use the plural: أَهْلًا وَسَهْلًا بِكُمْ · تَفَضَّلُوا. Plurals of people: جِيرَانٌ · لُطَفَاءُ · مُرَحِّبُونَ.</a:t>
             </a:r>
             <a:endParaRPr lang="en-US" dirty="0"/>
@@ -2576,7 +2612,11 @@
           <a:lstStyle/>
           <a:p>
             <a:r>
-              <a:rPr lang="en-US" dirty="0"/>
+              <a:rPr lang="ar-SA" dirty="0">
+                <a:latin typeface="Amiri" pitchFamily="2" charset="-78"/>
+                <a:ea typeface="Amiri" pitchFamily="2" charset="-78"/>
+                <a:cs typeface="Amiri" pitchFamily="2" charset="-78"/>
+              </a:rPr>
               <a:t>ROLE PLAY A (Core) — meeting the new neighbour.
 SET-UP IN THE BREAKOUT ROOM: A = examiner (reads the left column ONLY — the questions, in order), B = candidate (sees the task column; Core may use the help column), C = observer (ticks the feedback checklist). 1 minute preparation, about 3 minutes speaking, 1 minute feedback, then rotate.
 Task ! is the unexpected question: in the exam the candidate has not seen it — the examiner should read it without warning.
@@ -2668,7 +2708,11 @@
           <a:lstStyle/>
           <a:p>
             <a:r>
-              <a:rPr lang="en-US" dirty="0"/>
+              <a:rPr lang="ar-SA" dirty="0">
+                <a:latin typeface="Amiri" pitchFamily="2" charset="-78"/>
+                <a:ea typeface="Amiri" pitchFamily="2" charset="-78"/>
+                <a:cs typeface="Amiri" pitchFamily="2" charset="-78"/>
+              </a:rPr>
               <a:t>ROLE PLAY B (Core+) — helping them move in.
 SET-UP IN THE BREAKOUT ROOM: A = examiner (reads the left column ONLY — the questions, in order), B = candidate (sees the task column; Core may use the help column), C = observer (ticks the feedback checklist). 1 minute preparation, about 3 minutes speaking, 1 minute feedback, then rotate.
 Task ! is the unexpected question: in the exam the candidate has not seen it — the examiner should read it without warning.
@@ -3156,6 +3200,7 @@
                   <a:srgbClr val="D4AF37"/>
                 </a:solidFill>
                 <a:latin typeface="Amiri" pitchFamily="2" charset="-78"/>
+                <a:ea typeface="Amiri" pitchFamily="2" charset="-78"/>
                 <a:cs typeface="Amiri" pitchFamily="2" charset="-78"/>
               </a:rPr>
               <a:t>م</a:t>
@@ -3362,6 +3407,7 @@
                   <a:srgbClr val="D4AF37"/>
                 </a:solidFill>
                 <a:latin typeface="Amiri" pitchFamily="2" charset="-78"/>
+                <a:ea typeface="Amiri" pitchFamily="2" charset="-78"/>
                 <a:cs typeface="Amiri" pitchFamily="2" charset="-78"/>
               </a:rPr>
               <a:t>وَرْشَةُ التَّحَدُّثِ — الجِيرَانُ الجُدُدُ</a:t>
@@ -3819,6 +3865,7 @@
                   <a:srgbClr val="D4AF37"/>
                 </a:solidFill>
                 <a:latin typeface="Amiri" pitchFamily="2" charset="-78"/>
+                <a:ea typeface="Amiri" pitchFamily="2" charset="-78"/>
                 <a:cs typeface="Amiri" pitchFamily="2" charset="-78"/>
               </a:rPr>
               <a:t>م</a:t>
@@ -4139,6 +4186,7 @@
                   <a:srgbClr val="8A6D1E"/>
                 </a:solidFill>
                 <a:latin typeface="Amiri" pitchFamily="2" charset="-78"/>
+                <a:ea typeface="Amiri" pitchFamily="2" charset="-78"/>
                 <a:cs typeface="Amiri" pitchFamily="2" charset="-78"/>
               </a:rPr>
               <a:t>كَيْفَ الجِيرَانُ الجُدُدُ؟</a:t>
@@ -4419,6 +4467,7 @@
                   <a:srgbClr val="1B3B6F"/>
                 </a:solidFill>
                 <a:latin typeface="Amiri" pitchFamily="2" charset="-78"/>
+                <a:ea typeface="Amiri" pitchFamily="2" charset="-78"/>
                 <a:cs typeface="Amiri" pitchFamily="2" charset="-78"/>
               </a:rPr>
               <a:t>نَعَمْ، هُمْ … : أَبٌ وَأُمٌّ وَ…</a:t>
@@ -4495,6 +4544,7 @@
                   <a:srgbClr val="1B3B6F"/>
                 </a:solidFill>
                 <a:latin typeface="Amiri" pitchFamily="2" charset="-78"/>
+                <a:ea typeface="Amiri" pitchFamily="2" charset="-78"/>
                 <a:cs typeface="Amiri" pitchFamily="2" charset="-78"/>
               </a:rPr>
               <a:t>هَلْ رَأَيْتَ الجِيرَانَ الجُدُدَ؟</a:t>
@@ -4598,6 +4648,7 @@
                   <a:srgbClr val="1B3B6F"/>
                 </a:solidFill>
                 <a:latin typeface="Amiri" pitchFamily="2" charset="-78"/>
+                <a:ea typeface="Amiri" pitchFamily="2" charset="-78"/>
                 <a:cs typeface="Amiri" pitchFamily="2" charset="-78"/>
               </a:rPr>
               <a:t>هُوَ … وَشَعْرُهُ … وَيَبْدُو …</a:t>
@@ -4674,6 +4725,7 @@
                   <a:srgbClr val="1B3B6F"/>
                 </a:solidFill>
                 <a:latin typeface="Amiri" pitchFamily="2" charset="-78"/>
+                <a:ea typeface="Amiri" pitchFamily="2" charset="-78"/>
                 <a:cs typeface="Amiri" pitchFamily="2" charset="-78"/>
               </a:rPr>
               <a:t>كَيْفَ شَكْلُ الأَبِ؟</a:t>
@@ -4777,6 +4829,7 @@
                   <a:srgbClr val="1B3B6F"/>
                 </a:solidFill>
                 <a:latin typeface="Amiri" pitchFamily="2" charset="-78"/>
+                <a:ea typeface="Amiri" pitchFamily="2" charset="-78"/>
                 <a:cs typeface="Amiri" pitchFamily="2" charset="-78"/>
               </a:rPr>
               <a:t>ابْنَتُهُمُ الكُبْرَى … تُحِبُّ …</a:t>
@@ -4853,6 +4906,7 @@
                   <a:srgbClr val="1B3B6F"/>
                 </a:solidFill>
                 <a:latin typeface="Amiri" pitchFamily="2" charset="-78"/>
+                <a:ea typeface="Amiri" pitchFamily="2" charset="-78"/>
                 <a:cs typeface="Amiri" pitchFamily="2" charset="-78"/>
               </a:rPr>
               <a:t>وَالأَوْلَادُ؟</a:t>
@@ -4956,6 +5010,7 @@
                   <a:srgbClr val="1B3B6F"/>
                 </a:solidFill>
                 <a:latin typeface="Amiri" pitchFamily="2" charset="-78"/>
+                <a:ea typeface="Amiri" pitchFamily="2" charset="-78"/>
                 <a:cs typeface="Amiri" pitchFamily="2" charset="-78"/>
               </a:rPr>
               <a:t>مَا رَأْيُكَ أَنْ نَدْعُوَهُمْ … لِأَنَّ …</a:t>
@@ -5032,6 +5087,7 @@
                   <a:srgbClr val="1B3B6F"/>
                 </a:solidFill>
                 <a:latin typeface="Amiri" pitchFamily="2" charset="-78"/>
+                <a:ea typeface="Amiri" pitchFamily="2" charset="-78"/>
                 <a:cs typeface="Amiri" pitchFamily="2" charset="-78"/>
               </a:rPr>
               <a:t>رَائِعٌ! مَاذَا نَفْعَلُ لِنُرَحِّبَ بِهِمْ؟</a:t>
@@ -5135,6 +5191,7 @@
                   <a:srgbClr val="1B3B6F"/>
                 </a:solidFill>
                 <a:latin typeface="Amiri" pitchFamily="2" charset="-78"/>
+                <a:ea typeface="Amiri" pitchFamily="2" charset="-78"/>
                 <a:cs typeface="Amiri" pitchFamily="2" charset="-78"/>
               </a:rPr>
               <a:t>نَعَمْ، أَوَّلًا … ثُمَّ …</a:t>
@@ -5211,6 +5268,7 @@
                   <a:srgbClr val="1B3B6F"/>
                 </a:solidFill>
                 <a:latin typeface="Amiri" pitchFamily="2" charset="-78"/>
+                <a:ea typeface="Amiri" pitchFamily="2" charset="-78"/>
                 <a:cs typeface="Amiri" pitchFamily="2" charset="-78"/>
               </a:rPr>
               <a:t>هَلْ سَاعَدْتَهُمُ اليَوْمَ؟</a:t>
@@ -5420,6 +5478,7 @@
                   <a:srgbClr val="D4AF37"/>
                 </a:solidFill>
                 <a:latin typeface="Amiri" pitchFamily="2" charset="-78"/>
+                <a:ea typeface="Amiri" pitchFamily="2" charset="-78"/>
                 <a:cs typeface="Amiri" pitchFamily="2" charset="-78"/>
               </a:rPr>
               <a:t>م</a:t>
@@ -5740,6 +5799,7 @@
                   <a:srgbClr val="8A6D1E"/>
                 </a:solidFill>
                 <a:latin typeface="Amiri" pitchFamily="2" charset="-78"/>
+                <a:ea typeface="Amiri" pitchFamily="2" charset="-78"/>
                 <a:cs typeface="Amiri" pitchFamily="2" charset="-78"/>
               </a:rPr>
               <a:t>الحَيُّ الجَيِّدُ</a:t>
@@ -6020,6 +6080,7 @@
                   <a:srgbClr val="1B3B6F"/>
                 </a:solidFill>
                 <a:latin typeface="Amiri" pitchFamily="2" charset="-78"/>
+                <a:ea typeface="Amiri" pitchFamily="2" charset="-78"/>
                 <a:cs typeface="Amiri" pitchFamily="2" charset="-78"/>
               </a:rPr>
               <a:t>الجَارُ الجَيِّدُ هُوَ الَّذِي …</a:t>
@@ -6096,6 +6157,7 @@
                   <a:srgbClr val="1B3B6F"/>
                 </a:solidFill>
                 <a:latin typeface="Amiri" pitchFamily="2" charset="-78"/>
+                <a:ea typeface="Amiri" pitchFamily="2" charset="-78"/>
                 <a:cs typeface="Amiri" pitchFamily="2" charset="-78"/>
               </a:rPr>
               <a:t>مَا صِفَاتُ الجَارِ الجَيِّدِ فِي رَأْيِكَ؟</a:t>
@@ -6199,6 +6261,7 @@
                   <a:srgbClr val="1B3B6F"/>
                 </a:solidFill>
                 <a:latin typeface="Amiri" pitchFamily="2" charset="-78"/>
+                <a:ea typeface="Amiri" pitchFamily="2" charset="-78"/>
                 <a:cs typeface="Amiri" pitchFamily="2" charset="-78"/>
               </a:rPr>
               <a:t>كَانَ … أَمَّا اليَوْمَ فَكَثِيرٌ مِنَّا …</a:t>
@@ -6275,6 +6338,7 @@
                   <a:srgbClr val="1B3B6F"/>
                 </a:solidFill>
                 <a:latin typeface="Amiri" pitchFamily="2" charset="-78"/>
+                <a:ea typeface="Amiri" pitchFamily="2" charset="-78"/>
                 <a:cs typeface="Amiri" pitchFamily="2" charset="-78"/>
               </a:rPr>
               <a:t>هَلْ يَعْرِفُ النَّاسُ جِيرَانَهُمُ اليَوْمَ؟</a:t>
@@ -6378,6 +6442,7 @@
                   <a:srgbClr val="1B3B6F"/>
                 </a:solidFill>
                 <a:latin typeface="Amiri" pitchFamily="2" charset="-78"/>
+                <a:ea typeface="Amiri" pitchFamily="2" charset="-78"/>
                 <a:cs typeface="Amiri" pitchFamily="2" charset="-78"/>
               </a:rPr>
               <a:t>فِي … عِنْدَمَا … فَتَعَشَّيْنَا …</a:t>
@@ -6454,6 +6519,7 @@
                   <a:srgbClr val="1B3B6F"/>
                 </a:solidFill>
                 <a:latin typeface="Amiri" pitchFamily="2" charset="-78"/>
+                <a:ea typeface="Amiri" pitchFamily="2" charset="-78"/>
                 <a:cs typeface="Amiri" pitchFamily="2" charset="-78"/>
               </a:rPr>
               <a:t>أَعْطِنَا مِثَالًا مِنْ حَيِّكَ.</a:t>
@@ -6557,6 +6623,7 @@
                   <a:srgbClr val="1B3B6F"/>
                 </a:solidFill>
                 <a:latin typeface="Amiri" pitchFamily="2" charset="-78"/>
+                <a:ea typeface="Amiri" pitchFamily="2" charset="-78"/>
                 <a:cs typeface="Amiri" pitchFamily="2" charset="-78"/>
               </a:rPr>
               <a:t>صَحِيحٌ أَنَّ … غَيْرَ أَنَّ …</a:t>
@@ -6633,6 +6700,7 @@
                   <a:srgbClr val="1B3B6F"/>
                 </a:solidFill>
                 <a:latin typeface="Amiri" pitchFamily="2" charset="-78"/>
+                <a:ea typeface="Amiri" pitchFamily="2" charset="-78"/>
                 <a:cs typeface="Amiri" pitchFamily="2" charset="-78"/>
               </a:rPr>
               <a:t>لٰكِنَّ الخُصُوصِيَّةَ مُهِمَّةٌ أَيْضًا!</a:t>
@@ -6736,6 +6804,7 @@
                   <a:srgbClr val="1B3B6F"/>
                 </a:solidFill>
                 <a:latin typeface="Amiri" pitchFamily="2" charset="-78"/>
+                <a:ea typeface="Amiri" pitchFamily="2" charset="-78"/>
                 <a:cs typeface="Amiri" pitchFamily="2" charset="-78"/>
               </a:rPr>
               <a:t>لَوْ نَظَّمْتُ …، لَأَقَمْتُ …</a:t>
@@ -6812,6 +6881,7 @@
                   <a:srgbClr val="1B3B6F"/>
                 </a:solidFill>
                 <a:latin typeface="Amiri" pitchFamily="2" charset="-78"/>
+                <a:ea typeface="Amiri" pitchFamily="2" charset="-78"/>
                 <a:cs typeface="Amiri" pitchFamily="2" charset="-78"/>
               </a:rPr>
               <a:t>لَوْ نَظَّمْتَ حَدَثًا لِحَيِّكَ، مَاذَا يَكُونُ؟</a:t>
@@ -7021,6 +7091,7 @@
                   <a:srgbClr val="D4AF37"/>
                 </a:solidFill>
                 <a:latin typeface="Amiri" pitchFamily="2" charset="-78"/>
+                <a:ea typeface="Amiri" pitchFamily="2" charset="-78"/>
                 <a:cs typeface="Amiri" pitchFamily="2" charset="-78"/>
               </a:rPr>
               <a:t>م</a:t>
@@ -7341,6 +7412,7 @@
                   <a:srgbClr val="8A6D1E"/>
                 </a:solidFill>
                 <a:latin typeface="Amiri" pitchFamily="2" charset="-78"/>
+                <a:ea typeface="Amiri" pitchFamily="2" charset="-78"/>
                 <a:cs typeface="Amiri" pitchFamily="2" charset="-78"/>
               </a:rPr>
               <a:t>وَرَقَةُ المُلَاحِظِ</a:t>
@@ -8811,6 +8883,7 @@
                   <a:srgbClr val="D4AF37"/>
                 </a:solidFill>
                 <a:latin typeface="Amiri" pitchFamily="2" charset="-78"/>
+                <a:ea typeface="Amiri" pitchFamily="2" charset="-78"/>
                 <a:cs typeface="Amiri" pitchFamily="2" charset="-78"/>
               </a:rPr>
               <a:t>م</a:t>
@@ -9131,6 +9204,7 @@
                   <a:srgbClr val="8A6D1E"/>
                 </a:solidFill>
                 <a:latin typeface="Amiri" pitchFamily="2" charset="-78"/>
+                <a:ea typeface="Amiri" pitchFamily="2" charset="-78"/>
                 <a:cs typeface="Amiri" pitchFamily="2" charset="-78"/>
               </a:rPr>
               <a:t>نَمُوذَجُ الإِجَابَةِ</a:t>
@@ -9373,6 +9447,7 @@
                   <a:srgbClr val="1B3B6F"/>
                 </a:solidFill>
                 <a:latin typeface="Amiri" pitchFamily="2" charset="-78"/>
+                <a:ea typeface="Amiri" pitchFamily="2" charset="-78"/>
                 <a:cs typeface="Amiri" pitchFamily="2" charset="-78"/>
               </a:rPr>
               <a:t>أَهْلًا وَسَهْلًا بِكُمْ! أَنَا يُوسُفُ، وَأَسْكُنُ فِي البَيْتِ رَقْمِ عَشَرَةٍ.</a:t>
@@ -9449,6 +9524,7 @@
                   <a:srgbClr val="1B3B6F"/>
                 </a:solidFill>
                 <a:latin typeface="Amiri" pitchFamily="2" charset="-78"/>
+                <a:ea typeface="Amiri" pitchFamily="2" charset="-78"/>
                 <a:cs typeface="Amiri" pitchFamily="2" charset="-78"/>
               </a:rPr>
               <a:t>مَرْحَبًا، نَحْنُ الجِيرَانُ الجُدُدُ.</a:t>
@@ -9552,6 +9628,7 @@
                   <a:srgbClr val="1B3B6F"/>
                 </a:solidFill>
                 <a:latin typeface="Amiri" pitchFamily="2" charset="-78"/>
+                <a:ea typeface="Amiri" pitchFamily="2" charset="-78"/>
                 <a:cs typeface="Amiri" pitchFamily="2" charset="-78"/>
               </a:rPr>
               <a:t>أَسْكُنُ مَعَ أَبِي وَأُمِّي وَأُخْتِي الصَّغِيرَةِ.</a:t>
@@ -9628,6 +9705,7 @@
                   <a:srgbClr val="1B3B6F"/>
                 </a:solidFill>
                 <a:latin typeface="Amiri" pitchFamily="2" charset="-78"/>
+                <a:ea typeface="Amiri" pitchFamily="2" charset="-78"/>
                 <a:cs typeface="Amiri" pitchFamily="2" charset="-78"/>
               </a:rPr>
               <a:t>مَنْ يَسْكُنُ مَعَكَ؟</a:t>
@@ -9731,6 +9809,7 @@
                   <a:srgbClr val="1B3B6F"/>
                 </a:solidFill>
                 <a:latin typeface="Amiri" pitchFamily="2" charset="-78"/>
+                <a:ea typeface="Amiri" pitchFamily="2" charset="-78"/>
                 <a:cs typeface="Amiri" pitchFamily="2" charset="-78"/>
               </a:rPr>
               <a:t>نَعَمْ، المَسْجِدُ فِي آخِرِ الشَّارِعِ، بِجَانِبِ المَخْبَزِ.</a:t>
@@ -9807,6 +9886,7 @@
                   <a:srgbClr val="1B3B6F"/>
                 </a:solidFill>
                 <a:latin typeface="Amiri" pitchFamily="2" charset="-78"/>
+                <a:ea typeface="Amiri" pitchFamily="2" charset="-78"/>
                 <a:cs typeface="Amiri" pitchFamily="2" charset="-78"/>
               </a:rPr>
               <a:t>هَلْ يُوجَدُ مَسْجِدٌ قَرِيبٌ؟</a:t>
@@ -9910,6 +9990,7 @@
                   <a:srgbClr val="1B3B6F"/>
                 </a:solidFill>
                 <a:latin typeface="Amiri" pitchFamily="2" charset="-78"/>
+                <a:ea typeface="Amiri" pitchFamily="2" charset="-78"/>
                 <a:cs typeface="Amiri" pitchFamily="2" charset="-78"/>
               </a:rPr>
               <a:t>رَائِعٌ! نَسْتَطِيعُ أَنْ نَلْعَبَ مَعًا فِي الحَدِيقَةِ يَوْمَ السَّبْتِ.</a:t>
@@ -9986,6 +10067,7 @@
                   <a:srgbClr val="1B3B6F"/>
                 </a:solidFill>
                 <a:latin typeface="Amiri" pitchFamily="2" charset="-78"/>
+                <a:ea typeface="Amiri" pitchFamily="2" charset="-78"/>
                 <a:cs typeface="Amiri" pitchFamily="2" charset="-78"/>
               </a:rPr>
               <a:t>ابْنِي عُمْرُهُ أَرْبَعَ عَشْرَةَ سَنَةً، وَيُحِبُّ كُرَةَ القَدَمِ.</a:t>
@@ -10089,6 +10171,7 @@
                   <a:srgbClr val="1B3B6F"/>
                 </a:solidFill>
                 <a:latin typeface="Amiri" pitchFamily="2" charset="-78"/>
+                <a:ea typeface="Amiri" pitchFamily="2" charset="-78"/>
                 <a:cs typeface="Amiri" pitchFamily="2" charset="-78"/>
               </a:rPr>
               <a:t>نَعَمْ، لِأَنَّهُ هَادِئٌ، وَالجِيرَانُ لُطَفَاءُ جِدًّا.</a:t>
@@ -10165,6 +10248,7 @@
                   <a:srgbClr val="1B3B6F"/>
                 </a:solidFill>
                 <a:latin typeface="Amiri" pitchFamily="2" charset="-78"/>
+                <a:ea typeface="Amiri" pitchFamily="2" charset="-78"/>
                 <a:cs typeface="Amiri" pitchFamily="2" charset="-78"/>
               </a:rPr>
               <a:t>هَلْ تُحِبُّ هٰذَا الشَّارِعَ؟</a:t>
@@ -10374,6 +10458,7 @@
                   <a:srgbClr val="D4AF37"/>
                 </a:solidFill>
                 <a:latin typeface="Amiri" pitchFamily="2" charset="-78"/>
+                <a:ea typeface="Amiri" pitchFamily="2" charset="-78"/>
                 <a:cs typeface="Amiri" pitchFamily="2" charset="-78"/>
               </a:rPr>
               <a:t>م</a:t>
@@ -10694,6 +10779,7 @@
                   <a:srgbClr val="8A6D1E"/>
                 </a:solidFill>
                 <a:latin typeface="Amiri" pitchFamily="2" charset="-78"/>
+                <a:ea typeface="Amiri" pitchFamily="2" charset="-78"/>
                 <a:cs typeface="Amiri" pitchFamily="2" charset="-78"/>
               </a:rPr>
               <a:t>نَمُوذَجُ الإِجَابَةِ</a:t>
@@ -10936,6 +11022,7 @@
                   <a:srgbClr val="1B3B6F"/>
                 </a:solidFill>
                 <a:latin typeface="Amiri" pitchFamily="2" charset="-78"/>
+                <a:ea typeface="Amiri" pitchFamily="2" charset="-78"/>
                 <a:cs typeface="Amiri" pitchFamily="2" charset="-78"/>
               </a:rPr>
               <a:t>نَضَعُهَا فِي غُرْفَةِ الجُلُوسِ، أَمَامَ التِّلْفَازِ.</a:t>
@@ -11012,6 +11099,7 @@
                   <a:srgbClr val="1B3B6F"/>
                 </a:solidFill>
                 <a:latin typeface="Amiri" pitchFamily="2" charset="-78"/>
+                <a:ea typeface="Amiri" pitchFamily="2" charset="-78"/>
                 <a:cs typeface="Amiri" pitchFamily="2" charset="-78"/>
               </a:rPr>
               <a:t>شُكْرًا لِأَنَّكَ جِئْتَ! أَيْنَ نَضَعُ هٰذِهِ الكَنَبَةَ؟</a:t>
@@ -11115,6 +11203,7 @@
                   <a:srgbClr val="1B3B6F"/>
                 </a:solidFill>
                 <a:latin typeface="Amiri" pitchFamily="2" charset="-78"/>
+                <a:ea typeface="Amiri" pitchFamily="2" charset="-78"/>
                 <a:cs typeface="Amiri" pitchFamily="2" charset="-78"/>
               </a:rPr>
               <a:t>هِيَ ثَقِيلَةٌ جِدًّا! نَحْمِلُهَا مَعًا إِلَى غُرْفَةِ النَّوْمِ فِي الطَّابِقِ الأَوَّلِ.</a:t>
@@ -11191,6 +11280,7 @@
                   <a:srgbClr val="1B3B6F"/>
                 </a:solidFill>
                 <a:latin typeface="Amiri" pitchFamily="2" charset="-78"/>
+                <a:ea typeface="Amiri" pitchFamily="2" charset="-78"/>
                 <a:cs typeface="Amiri" pitchFamily="2" charset="-78"/>
               </a:rPr>
               <a:t>وَهٰذِهِ الخِزَانَةُ الكَبِيرَةُ؟</a:t>
@@ -11294,6 +11384,7 @@
                   <a:srgbClr val="1B3B6F"/>
                 </a:solidFill>
                 <a:latin typeface="Amiri" pitchFamily="2" charset="-78"/>
+                <a:ea typeface="Amiri" pitchFamily="2" charset="-78"/>
                 <a:cs typeface="Amiri" pitchFamily="2" charset="-78"/>
               </a:rPr>
               <a:t>اللَّوْنُ الأَصْفَرُ جَمِيلٌ، لٰكِنَّ الأَبْيَضَ أَفْضَلُ لِغُرْفَةٍ صَغِيرَةٍ.</a:t>
@@ -11370,6 +11461,7 @@
                   <a:srgbClr val="1B3B6F"/>
                 </a:solidFill>
                 <a:latin typeface="Amiri" pitchFamily="2" charset="-78"/>
+                <a:ea typeface="Amiri" pitchFamily="2" charset="-78"/>
                 <a:cs typeface="Amiri" pitchFamily="2" charset="-78"/>
               </a:rPr>
               <a:t>مَا رَأْيُكَ فِي لَوْنِ الجُدْرَانِ؟</a:t>
@@ -11473,6 +11565,7 @@
                   <a:srgbClr val="1B3B6F"/>
                 </a:solidFill>
                 <a:latin typeface="Amiri" pitchFamily="2" charset="-78"/>
+                <a:ea typeface="Amiri" pitchFamily="2" charset="-78"/>
                 <a:cs typeface="Amiri" pitchFamily="2" charset="-78"/>
               </a:rPr>
               <a:t>مَا المُشْكِلَةُ بِالضَّبْطِ؟ هَلْ تُرِيدُ رَقْمَ الفَنِّيِّ الَّذِي أَصْلَحَ ثَلَّاجَتَنَا؟</a:t>
@@ -11549,6 +11642,7 @@
                   <a:srgbClr val="1B3B6F"/>
                 </a:solidFill>
                 <a:latin typeface="Amiri" pitchFamily="2" charset="-78"/>
+                <a:ea typeface="Amiri" pitchFamily="2" charset="-78"/>
                 <a:cs typeface="Amiri" pitchFamily="2" charset="-78"/>
               </a:rPr>
               <a:t>… الثَّلَّاجَةُ لَا تَعْمَلُ!</a:t>
@@ -11652,6 +11746,7 @@
                   <a:srgbClr val="1B3B6F"/>
                 </a:solidFill>
                 <a:latin typeface="Amiri" pitchFamily="2" charset="-78"/>
+                <a:ea typeface="Amiri" pitchFamily="2" charset="-78"/>
                 <a:cs typeface="Amiri" pitchFamily="2" charset="-78"/>
               </a:rPr>
               <a:t>بِكُلِّ سُرُورٍ، شُكْرًا جَزِيلًا!</a:t>
@@ -11728,6 +11823,7 @@
                   <a:srgbClr val="1B3B6F"/>
                 </a:solidFill>
                 <a:latin typeface="Amiri" pitchFamily="2" charset="-78"/>
+                <a:ea typeface="Amiri" pitchFamily="2" charset="-78"/>
                 <a:cs typeface="Amiri" pitchFamily="2" charset="-78"/>
               </a:rPr>
               <a:t>تَعَالَ نَشْرَبِ الشَّايَ!</a:t>
@@ -11937,6 +12033,7 @@
                   <a:srgbClr val="D4AF37"/>
                 </a:solidFill>
                 <a:latin typeface="Amiri" pitchFamily="2" charset="-78"/>
+                <a:ea typeface="Amiri" pitchFamily="2" charset="-78"/>
                 <a:cs typeface="Amiri" pitchFamily="2" charset="-78"/>
               </a:rPr>
               <a:t>م</a:t>
@@ -12257,6 +12354,7 @@
                   <a:srgbClr val="8A6D1E"/>
                 </a:solidFill>
                 <a:latin typeface="Amiri" pitchFamily="2" charset="-78"/>
+                <a:ea typeface="Amiri" pitchFamily="2" charset="-78"/>
                 <a:cs typeface="Amiri" pitchFamily="2" charset="-78"/>
               </a:rPr>
               <a:t>نَمُوذَجُ الإِجَابَةِ</a:t>
@@ -12499,6 +12597,7 @@
                   <a:srgbClr val="1B3B6F"/>
                 </a:solidFill>
                 <a:latin typeface="Amiri" pitchFamily="2" charset="-78"/>
+                <a:ea typeface="Amiri" pitchFamily="2" charset="-78"/>
                 <a:cs typeface="Amiri" pitchFamily="2" charset="-78"/>
               </a:rPr>
               <a:t>نَعَمْ، هُمْ خَمْسَةٌ: أَبٌ وَأُمٌّ وَثَلَاثَةُ أَوْلَادٍ، وَجَاؤُوا مِنَ المَغْرِبِ.</a:t>
@@ -12575,6 +12674,7 @@
                   <a:srgbClr val="1B3B6F"/>
                 </a:solidFill>
                 <a:latin typeface="Amiri" pitchFamily="2" charset="-78"/>
+                <a:ea typeface="Amiri" pitchFamily="2" charset="-78"/>
                 <a:cs typeface="Amiri" pitchFamily="2" charset="-78"/>
               </a:rPr>
               <a:t>هَلْ رَأَيْتَ الجِيرَانَ الجُدُدَ؟</a:t>
@@ -12678,6 +12778,7 @@
                   <a:srgbClr val="1B3B6F"/>
                 </a:solidFill>
                 <a:latin typeface="Amiri" pitchFamily="2" charset="-78"/>
+                <a:ea typeface="Amiri" pitchFamily="2" charset="-78"/>
                 <a:cs typeface="Amiri" pitchFamily="2" charset="-78"/>
               </a:rPr>
               <a:t>هُوَ طَوِيلٌ، وَشَعْرُهُ رَمَادِيٌّ، وَيَبْدُو هَادِئًا وَمُرَحِّبًا.</a:t>
@@ -12754,6 +12855,7 @@
                   <a:srgbClr val="1B3B6F"/>
                 </a:solidFill>
                 <a:latin typeface="Amiri" pitchFamily="2" charset="-78"/>
+                <a:ea typeface="Amiri" pitchFamily="2" charset="-78"/>
                 <a:cs typeface="Amiri" pitchFamily="2" charset="-78"/>
               </a:rPr>
               <a:t>كَيْفَ شَكْلُ الأَبِ؟</a:t>
@@ -12857,6 +12959,7 @@
                   <a:srgbClr val="1B3B6F"/>
                 </a:solidFill>
                 <a:latin typeface="Amiri" pitchFamily="2" charset="-78"/>
+                <a:ea typeface="Amiri" pitchFamily="2" charset="-78"/>
                 <a:cs typeface="Amiri" pitchFamily="2" charset="-78"/>
               </a:rPr>
               <a:t>ابْنَتُهُمُ الكُبْرَى فِي عُمْرِي، وَتُحِبُّ الرَّسْمَ، وَسَتَدْرُسُ فِي مَدْرَسَتِي.</a:t>
@@ -12933,6 +13036,7 @@
                   <a:srgbClr val="1B3B6F"/>
                 </a:solidFill>
                 <a:latin typeface="Amiri" pitchFamily="2" charset="-78"/>
+                <a:ea typeface="Amiri" pitchFamily="2" charset="-78"/>
                 <a:cs typeface="Amiri" pitchFamily="2" charset="-78"/>
               </a:rPr>
               <a:t>وَالأَوْلَادُ؟</a:t>
@@ -13036,6 +13140,7 @@
                   <a:srgbClr val="1B3B6F"/>
                 </a:solidFill>
                 <a:latin typeface="Amiri" pitchFamily="2" charset="-78"/>
+                <a:ea typeface="Amiri" pitchFamily="2" charset="-78"/>
                 <a:cs typeface="Amiri" pitchFamily="2" charset="-78"/>
               </a:rPr>
               <a:t>مَا رَأْيُكَ أَنْ نَدْعُوَهُمْ إِلَى العَشَاءِ يَوْمَ الجُمُعَةِ، لِأَنَّ مَطْبَخَهُمْ لَيْسَ جَاهِزًا بَعْدُ؟</a:t>
@@ -13112,6 +13217,7 @@
                   <a:srgbClr val="1B3B6F"/>
                 </a:solidFill>
                 <a:latin typeface="Amiri" pitchFamily="2" charset="-78"/>
+                <a:ea typeface="Amiri" pitchFamily="2" charset="-78"/>
                 <a:cs typeface="Amiri" pitchFamily="2" charset="-78"/>
               </a:rPr>
               <a:t>رَائِعٌ! مَاذَا نَفْعَلُ لِنُرَحِّبَ بِهِمْ؟</a:t>
@@ -13215,6 +13321,7 @@
                   <a:srgbClr val="1B3B6F"/>
                 </a:solidFill>
                 <a:latin typeface="Amiri" pitchFamily="2" charset="-78"/>
+                <a:ea typeface="Amiri" pitchFamily="2" charset="-78"/>
                 <a:cs typeface="Amiri" pitchFamily="2" charset="-78"/>
               </a:rPr>
               <a:t>نَعَمْ، أَوَّلًا حَمَلْتُ الصَّنَادِيقَ مَعَ الأَبِ، ثُمَّ رَكَّبْتُ سَرِيرَ الوَلَدِ الصَّغِيرِ.</a:t>
@@ -13291,6 +13398,7 @@
                   <a:srgbClr val="1B3B6F"/>
                 </a:solidFill>
                 <a:latin typeface="Amiri" pitchFamily="2" charset="-78"/>
+                <a:ea typeface="Amiri" pitchFamily="2" charset="-78"/>
                 <a:cs typeface="Amiri" pitchFamily="2" charset="-78"/>
               </a:rPr>
               <a:t>هَلْ سَاعَدْتَهُمُ اليَوْمَ؟</a:t>
@@ -13500,6 +13608,7 @@
                   <a:srgbClr val="D4AF37"/>
                 </a:solidFill>
                 <a:latin typeface="Amiri" pitchFamily="2" charset="-78"/>
+                <a:ea typeface="Amiri" pitchFamily="2" charset="-78"/>
                 <a:cs typeface="Amiri" pitchFamily="2" charset="-78"/>
               </a:rPr>
               <a:t>م</a:t>
@@ -13820,6 +13929,7 @@
                   <a:srgbClr val="8A6D1E"/>
                 </a:solidFill>
                 <a:latin typeface="Amiri" pitchFamily="2" charset="-78"/>
+                <a:ea typeface="Amiri" pitchFamily="2" charset="-78"/>
                 <a:cs typeface="Amiri" pitchFamily="2" charset="-78"/>
               </a:rPr>
               <a:t>نَمُوذَجُ الإِجَابَةِ</a:t>
@@ -14062,6 +14172,7 @@
                   <a:srgbClr val="1B3B6F"/>
                 </a:solidFill>
                 <a:latin typeface="Amiri" pitchFamily="2" charset="-78"/>
+                <a:ea typeface="Amiri" pitchFamily="2" charset="-78"/>
                 <a:cs typeface="Amiri" pitchFamily="2" charset="-78"/>
               </a:rPr>
               <a:t>الجَارُ الجَيِّدُ هُوَ الَّذِي يَحْتَرِمُ خُصُوصِيَّتَكَ، وَيُسَاعِدُكَ عِنْدَمَا تَحْتَاجُ إِلَيْهِ.</a:t>
@@ -14138,6 +14249,7 @@
                   <a:srgbClr val="1B3B6F"/>
                 </a:solidFill>
                 <a:latin typeface="Amiri" pitchFamily="2" charset="-78"/>
+                <a:ea typeface="Amiri" pitchFamily="2" charset="-78"/>
                 <a:cs typeface="Amiri" pitchFamily="2" charset="-78"/>
               </a:rPr>
               <a:t>مَا صِفَاتُ الجَارِ الجَيِّدِ فِي رَأْيِكَ؟</a:t>
@@ -14241,6 +14353,7 @@
                   <a:srgbClr val="1B3B6F"/>
                 </a:solidFill>
                 <a:latin typeface="Amiri" pitchFamily="2" charset="-78"/>
+                <a:ea typeface="Amiri" pitchFamily="2" charset="-78"/>
                 <a:cs typeface="Amiri" pitchFamily="2" charset="-78"/>
               </a:rPr>
               <a:t>كَانَ الجِيرَانُ يَتَبَادَلُونَ الطَّعَامَ وَالزِّيَارَاتِ، أَمَّا اليَوْمَ فَكَثِيرٌ مِنَّا لَا يَعْرِفُ اسْمَ جَارِهِ.</a:t>
@@ -14317,6 +14430,7 @@
                   <a:srgbClr val="1B3B6F"/>
                 </a:solidFill>
                 <a:latin typeface="Amiri" pitchFamily="2" charset="-78"/>
+                <a:ea typeface="Amiri" pitchFamily="2" charset="-78"/>
                 <a:cs typeface="Amiri" pitchFamily="2" charset="-78"/>
               </a:rPr>
               <a:t>هَلْ يَعْرِفُ النَّاسُ جِيرَانَهُمُ اليَوْمَ؟</a:t>
@@ -14420,6 +14534,7 @@
                   <a:srgbClr val="1B3B6F"/>
                 </a:solidFill>
                 <a:latin typeface="Amiri" pitchFamily="2" charset="-78"/>
+                <a:ea typeface="Amiri" pitchFamily="2" charset="-78"/>
                 <a:cs typeface="Amiri" pitchFamily="2" charset="-78"/>
               </a:rPr>
               <a:t>فِي الشِّتَاءِ المَاضِي، عِنْدَمَا انْقَطَعَتِ الكَهْرَبَاءُ، دَعَتْنَا جَارَتُنَا العَجُوزُ إِلَى بَيْتِهَا، فَتَعَشَّيْنَا عَلَى ضَوْءِ الشُّمُوعِ.</a:t>
@@ -14496,6 +14611,7 @@
                   <a:srgbClr val="1B3B6F"/>
                 </a:solidFill>
                 <a:latin typeface="Amiri" pitchFamily="2" charset="-78"/>
+                <a:ea typeface="Amiri" pitchFamily="2" charset="-78"/>
                 <a:cs typeface="Amiri" pitchFamily="2" charset="-78"/>
               </a:rPr>
               <a:t>أَعْطِنَا مِثَالًا مِنْ حَيِّكَ.</a:t>
@@ -14599,6 +14715,7 @@
                   <a:srgbClr val="1B3B6F"/>
                 </a:solidFill>
                 <a:latin typeface="Amiri" pitchFamily="2" charset="-78"/>
+                <a:ea typeface="Amiri" pitchFamily="2" charset="-78"/>
                 <a:cs typeface="Amiri" pitchFamily="2" charset="-78"/>
               </a:rPr>
               <a:t>صَحِيحٌ أَنَّ لِكُلِّ أُسْرَةٍ خُصُوصِيَّتَهَا، غَيْرَ أَنَّ التَّحِيَّةَ وَالسُّؤَالَ عَنِ الجَارِ لَا يَضُرَّانِ أَحَدًا.</a:t>
@@ -14675,6 +14792,7 @@
                   <a:srgbClr val="1B3B6F"/>
                 </a:solidFill>
                 <a:latin typeface="Amiri" pitchFamily="2" charset="-78"/>
+                <a:ea typeface="Amiri" pitchFamily="2" charset="-78"/>
                 <a:cs typeface="Amiri" pitchFamily="2" charset="-78"/>
               </a:rPr>
               <a:t>لٰكِنَّ الخُصُوصِيَّةَ مُهِمَّةٌ أَيْضًا!</a:t>
@@ -14778,6 +14896,7 @@
                   <a:srgbClr val="1B3B6F"/>
                 </a:solidFill>
                 <a:latin typeface="Amiri" pitchFamily="2" charset="-78"/>
+                <a:ea typeface="Amiri" pitchFamily="2" charset="-78"/>
                 <a:cs typeface="Amiri" pitchFamily="2" charset="-78"/>
               </a:rPr>
               <a:t>لَوْ نَظَّمْتُ حَدَثًا، لَأَقَمْتُ غَدَاءً فِي الشَّارِعِ، يُحْضِرُ فِيهِ كُلُّ بَيْتٍ طَبَقًا مِنْ بَلَدِهِ.</a:t>
@@ -14854,6 +14973,7 @@
                   <a:srgbClr val="1B3B6F"/>
                 </a:solidFill>
                 <a:latin typeface="Amiri" pitchFamily="2" charset="-78"/>
+                <a:ea typeface="Amiri" pitchFamily="2" charset="-78"/>
                 <a:cs typeface="Amiri" pitchFamily="2" charset="-78"/>
               </a:rPr>
               <a:t>لَوْ نَظَّمْتَ حَدَثًا لِحَيِّكَ، مَاذَا يَكُونُ؟</a:t>
@@ -15063,6 +15183,7 @@
                   <a:srgbClr val="D4AF37"/>
                 </a:solidFill>
                 <a:latin typeface="Amiri" pitchFamily="2" charset="-78"/>
+                <a:ea typeface="Amiri" pitchFamily="2" charset="-78"/>
                 <a:cs typeface="Amiri" pitchFamily="2" charset="-78"/>
               </a:rPr>
               <a:t>م</a:t>
@@ -15383,6 +15504,7 @@
                   <a:srgbClr val="8A6D1E"/>
                 </a:solidFill>
                 <a:latin typeface="Amiri" pitchFamily="2" charset="-78"/>
+                <a:ea typeface="Amiri" pitchFamily="2" charset="-78"/>
                 <a:cs typeface="Amiri" pitchFamily="2" charset="-78"/>
               </a:rPr>
               <a:t>أَنَا وَجِيرَانِي</a:t>
@@ -15663,6 +15785,7 @@
                   <a:srgbClr val="1B3B6F"/>
                 </a:solidFill>
                 <a:latin typeface="Amiri" pitchFamily="2" charset="-78"/>
+                <a:ea typeface="Amiri" pitchFamily="2" charset="-78"/>
                 <a:cs typeface="Amiri" pitchFamily="2" charset="-78"/>
               </a:rPr>
               <a:t>جِيرَانُنَا …</a:t>
@@ -15739,6 +15862,7 @@
                   <a:srgbClr val="1B3B6F"/>
                 </a:solidFill>
                 <a:latin typeface="Amiri" pitchFamily="2" charset="-78"/>
+                <a:ea typeface="Amiri" pitchFamily="2" charset="-78"/>
                 <a:cs typeface="Amiri" pitchFamily="2" charset="-78"/>
               </a:rPr>
               <a:t>مَنْ جِيرَانُكَ؟</a:t>
@@ -15907,6 +16031,7 @@
                   <a:srgbClr val="1B3B6F"/>
                 </a:solidFill>
                 <a:latin typeface="Amiri" pitchFamily="2" charset="-78"/>
+                <a:ea typeface="Amiri" pitchFamily="2" charset="-78"/>
                 <a:cs typeface="Amiri" pitchFamily="2" charset="-78"/>
               </a:rPr>
               <a:t>جَارُنَا / جَارَتُنَا … هُوَ / هِيَ …</a:t>
@@ -15983,6 +16108,7 @@
                   <a:srgbClr val="1B3B6F"/>
                 </a:solidFill>
                 <a:latin typeface="Amiri" pitchFamily="2" charset="-78"/>
+                <a:ea typeface="Amiri" pitchFamily="2" charset="-78"/>
                 <a:cs typeface="Amiri" pitchFamily="2" charset="-78"/>
               </a:rPr>
               <a:t>صِفْ أَحَدَ جِيرَانِكَ.</a:t>
@@ -16151,6 +16277,7 @@
                   <a:srgbClr val="1B3B6F"/>
                 </a:solidFill>
                 <a:latin typeface="Amiri" pitchFamily="2" charset="-78"/>
+                <a:ea typeface="Amiri" pitchFamily="2" charset="-78"/>
                 <a:cs typeface="Amiri" pitchFamily="2" charset="-78"/>
               </a:rPr>
               <a:t>بَيْتُنَا … وَبَابُهُ …</a:t>
@@ -16227,6 +16354,7 @@
                   <a:srgbClr val="1B3B6F"/>
                 </a:solidFill>
                 <a:latin typeface="Amiri" pitchFamily="2" charset="-78"/>
+                <a:ea typeface="Amiri" pitchFamily="2" charset="-78"/>
                 <a:cs typeface="Amiri" pitchFamily="2" charset="-78"/>
               </a:rPr>
               <a:t>مَا لَوْنُ بَيْتِكُمْ؟</a:t>
@@ -16395,6 +16523,7 @@
                   <a:srgbClr val="1B3B6F"/>
                 </a:solidFill>
                 <a:latin typeface="Amiri" pitchFamily="2" charset="-78"/>
+                <a:ea typeface="Amiri" pitchFamily="2" charset="-78"/>
                 <a:cs typeface="Amiri" pitchFamily="2" charset="-78"/>
               </a:rPr>
               <a:t>نَلْعَبُ … / نَذْهَبُ …</a:t>
@@ -16471,6 +16600,7 @@
                   <a:srgbClr val="1B3B6F"/>
                 </a:solidFill>
                 <a:latin typeface="Amiri" pitchFamily="2" charset="-78"/>
+                <a:ea typeface="Amiri" pitchFamily="2" charset="-78"/>
                 <a:cs typeface="Amiri" pitchFamily="2" charset="-78"/>
               </a:rPr>
               <a:t>مَاذَا تَفْعَلُ مَعَ أَصْدِقَائِكَ فِي الحَيِّ؟</a:t>
@@ -16639,6 +16769,7 @@
                   <a:srgbClr val="1B3B6F"/>
                 </a:solidFill>
                 <a:latin typeface="Amiri" pitchFamily="2" charset="-78"/>
+                <a:ea typeface="Amiri" pitchFamily="2" charset="-78"/>
                 <a:cs typeface="Amiri" pitchFamily="2" charset="-78"/>
               </a:rPr>
               <a:t>نَعَمْ، دَعَوْنَاهُمْ إِلَى …</a:t>
@@ -16715,6 +16846,7 @@
                   <a:srgbClr val="1B3B6F"/>
                 </a:solidFill>
                 <a:latin typeface="Amiri" pitchFamily="2" charset="-78"/>
+                <a:ea typeface="Amiri" pitchFamily="2" charset="-78"/>
                 <a:cs typeface="Amiri" pitchFamily="2" charset="-78"/>
               </a:rPr>
               <a:t>هَلْ دَعَوْتَ جِيرَانَكَ إِلَى بَيْتِكُمْ؟</a:t>
@@ -16869,6 +17001,7 @@
                   <a:srgbClr val="1B3B6F"/>
                 </a:solidFill>
                 <a:latin typeface="Amiri" pitchFamily="2" charset="-78"/>
+                <a:ea typeface="Amiri" pitchFamily="2" charset="-78"/>
                 <a:cs typeface="Amiri" pitchFamily="2" charset="-78"/>
               </a:rPr>
               <a:t>عَفْوًا، هَلْ يُمْكِنُ أَنْ تُعِيدَ السُّؤَالَ؟</a:t>
@@ -17002,6 +17135,7 @@
                   <a:srgbClr val="D4AF37"/>
                 </a:solidFill>
                 <a:latin typeface="Amiri" pitchFamily="2" charset="-78"/>
+                <a:ea typeface="Amiri" pitchFamily="2" charset="-78"/>
                 <a:cs typeface="Amiri" pitchFamily="2" charset="-78"/>
               </a:rPr>
               <a:t>م</a:t>
@@ -17322,6 +17456,7 @@
                   <a:srgbClr val="8A6D1E"/>
                 </a:solidFill>
                 <a:latin typeface="Amiri" pitchFamily="2" charset="-78"/>
+                <a:ea typeface="Amiri" pitchFamily="2" charset="-78"/>
                 <a:cs typeface="Amiri" pitchFamily="2" charset="-78"/>
               </a:rPr>
               <a:t>حَيِّي وَالنَّاسُ فِيهِ</a:t>
@@ -17602,6 +17737,7 @@
                   <a:srgbClr val="1B3B6F"/>
                 </a:solidFill>
                 <a:latin typeface="Amiri" pitchFamily="2" charset="-78"/>
+                <a:ea typeface="Amiri" pitchFamily="2" charset="-78"/>
                 <a:cs typeface="Amiri" pitchFamily="2" charset="-78"/>
               </a:rPr>
               <a:t>شَارِعِي … فِيهِ … البُيُوتُ …</a:t>
@@ -17678,6 +17814,7 @@
                   <a:srgbClr val="1B3B6F"/>
                 </a:solidFill>
                 <a:latin typeface="Amiri" pitchFamily="2" charset="-78"/>
+                <a:ea typeface="Amiri" pitchFamily="2" charset="-78"/>
                 <a:cs typeface="Amiri" pitchFamily="2" charset="-78"/>
               </a:rPr>
               <a:t>صِفْ شَارِعَكَ وَبُيُوتَهُ.</a:t>
@@ -17781,6 +17918,7 @@
                   <a:srgbClr val="1B3B6F"/>
                 </a:solidFill>
                 <a:latin typeface="Amiri" pitchFamily="2" charset="-78"/>
+                <a:ea typeface="Amiri" pitchFamily="2" charset="-78"/>
                 <a:cs typeface="Amiri" pitchFamily="2" charset="-78"/>
               </a:rPr>
               <a:t>نَعَمْ، … اسْمُهُ … وَهُوَ …</a:t>
@@ -17857,6 +17995,7 @@
                   <a:srgbClr val="1B3B6F"/>
                 </a:solidFill>
                 <a:latin typeface="Amiri" pitchFamily="2" charset="-78"/>
+                <a:ea typeface="Amiri" pitchFamily="2" charset="-78"/>
                 <a:cs typeface="Amiri" pitchFamily="2" charset="-78"/>
               </a:rPr>
               <a:t>هَلْ عِنْدَكَ صَدِيقٌ مِنْ جِيرَانِكَ؟ صِفْهُ.</a:t>
@@ -17960,6 +18099,7 @@
                   <a:srgbClr val="1B3B6F"/>
                 </a:solidFill>
                 <a:latin typeface="Amiri" pitchFamily="2" charset="-78"/>
+                <a:ea typeface="Amiri" pitchFamily="2" charset="-78"/>
                 <a:cs typeface="Amiri" pitchFamily="2" charset="-78"/>
               </a:rPr>
               <a:t>أَوَّلًا … ثُمَّ …</a:t>
@@ -18036,6 +18176,7 @@
                   <a:srgbClr val="1B3B6F"/>
                 </a:solidFill>
                 <a:latin typeface="Amiri" pitchFamily="2" charset="-78"/>
+                <a:ea typeface="Amiri" pitchFamily="2" charset="-78"/>
                 <a:cs typeface="Amiri" pitchFamily="2" charset="-78"/>
               </a:rPr>
               <a:t>كَيْفَ رَحَّبْتُمْ بِجِيرَانٍ جُدُدٍ؟</a:t>
@@ -18139,6 +18280,7 @@
                   <a:srgbClr val="1B3B6F"/>
                 </a:solidFill>
                 <a:latin typeface="Amiri" pitchFamily="2" charset="-78"/>
+                <a:ea typeface="Amiri" pitchFamily="2" charset="-78"/>
                 <a:cs typeface="Amiri" pitchFamily="2" charset="-78"/>
               </a:rPr>
               <a:t>أُحِبُّ … لٰكِنِّي لَا أُحِبُّ …</a:t>
@@ -18215,6 +18357,7 @@
                   <a:srgbClr val="1B3B6F"/>
                 </a:solidFill>
                 <a:latin typeface="Amiri" pitchFamily="2" charset="-78"/>
+                <a:ea typeface="Amiri" pitchFamily="2" charset="-78"/>
                 <a:cs typeface="Amiri" pitchFamily="2" charset="-78"/>
               </a:rPr>
               <a:t>مَا الَّذِي تُحِبُّهُ وَمَا الَّذِي لَا تُحِبُّهُ فِي حَيِّكَ؟</a:t>
@@ -18318,6 +18461,7 @@
                   <a:srgbClr val="1B3B6F"/>
                 </a:solidFill>
                 <a:latin typeface="Amiri" pitchFamily="2" charset="-78"/>
+                <a:ea typeface="Amiri" pitchFamily="2" charset="-78"/>
                 <a:cs typeface="Amiri" pitchFamily="2" charset="-78"/>
               </a:rPr>
               <a:t>أُرِيدُ أَنْ أَسْكُنَ فِي … لِأَنَّ …</a:t>
@@ -18394,6 +18538,7 @@
                   <a:srgbClr val="1B3B6F"/>
                 </a:solidFill>
                 <a:latin typeface="Amiri" pitchFamily="2" charset="-78"/>
+                <a:ea typeface="Amiri" pitchFamily="2" charset="-78"/>
                 <a:cs typeface="Amiri" pitchFamily="2" charset="-78"/>
               </a:rPr>
               <a:t>أَيْنَ تُرِيدُ أَنْ تَسْكُنَ فِي المُسْتَقْبَلِ؟</a:t>
@@ -18603,6 +18748,7 @@
                   <a:srgbClr val="D4AF37"/>
                 </a:solidFill>
                 <a:latin typeface="Amiri" pitchFamily="2" charset="-78"/>
+                <a:ea typeface="Amiri" pitchFamily="2" charset="-78"/>
                 <a:cs typeface="Amiri" pitchFamily="2" charset="-78"/>
               </a:rPr>
               <a:t>م</a:t>
@@ -18923,6 +19069,7 @@
                   <a:srgbClr val="8A6D1E"/>
                 </a:solidFill>
                 <a:latin typeface="Amiri" pitchFamily="2" charset="-78"/>
+                <a:ea typeface="Amiri" pitchFamily="2" charset="-78"/>
                 <a:cs typeface="Amiri" pitchFamily="2" charset="-78"/>
               </a:rPr>
               <a:t>الجِيرَةُ وَالمُجْتَمَعُ</a:t>
@@ -19203,6 +19350,7 @@
                   <a:srgbClr val="1B3B6F"/>
                 </a:solidFill>
                 <a:latin typeface="Amiri" pitchFamily="2" charset="-78"/>
+                <a:ea typeface="Amiri" pitchFamily="2" charset="-78"/>
                 <a:cs typeface="Amiri" pitchFamily="2" charset="-78"/>
               </a:rPr>
               <a:t>لِأَنَّ … فَمَهْمَا …</a:t>
@@ -19279,6 +19427,7 @@
                   <a:srgbClr val="1B3B6F"/>
                 </a:solidFill>
                 <a:latin typeface="Amiri" pitchFamily="2" charset="-78"/>
+                <a:ea typeface="Amiri" pitchFamily="2" charset="-78"/>
                 <a:cs typeface="Amiri" pitchFamily="2" charset="-78"/>
               </a:rPr>
               <a:t>لِمَاذَا يَقُولُ المَثَلُ «الجَارُ قَبْلَ الدَّارِ»؟</a:t>
@@ -19382,6 +19531,7 @@
                   <a:srgbClr val="1B3B6F"/>
                 </a:solidFill>
                 <a:latin typeface="Amiri" pitchFamily="2" charset="-78"/>
+                <a:ea typeface="Amiri" pitchFamily="2" charset="-78"/>
                 <a:cs typeface="Amiri" pitchFamily="2" charset="-78"/>
               </a:rPr>
               <a:t>صَحِيحٌ أَنَّ … غَيْرَ أَنَّ …</a:t>
@@ -19458,6 +19608,7 @@
                   <a:srgbClr val="1B3B6F"/>
                 </a:solidFill>
                 <a:latin typeface="Amiri" pitchFamily="2" charset="-78"/>
+                <a:ea typeface="Amiri" pitchFamily="2" charset="-78"/>
                 <a:cs typeface="Amiri" pitchFamily="2" charset="-78"/>
               </a:rPr>
               <a:t>هَلِ المُدُنُ الكَبِيرَةُ تَجْعَلُ النَّاسَ أَكْثَرَ وَحْدَةً؟</a:t>
@@ -19561,6 +19712,7 @@
                   <a:srgbClr val="1B3B6F"/>
                 </a:solidFill>
                 <a:latin typeface="Amiri" pitchFamily="2" charset="-78"/>
+                <a:ea typeface="Amiri" pitchFamily="2" charset="-78"/>
                 <a:cs typeface="Amiri" pitchFamily="2" charset="-78"/>
               </a:rPr>
               <a:t>كَانَ الجِيرَانُ … أَمَّا اليَوْمَ فَتُغْلِقُ …</a:t>
@@ -19637,6 +19789,7 @@
                   <a:srgbClr val="1B3B6F"/>
                 </a:solidFill>
                 <a:latin typeface="Amiri" pitchFamily="2" charset="-78"/>
+                <a:ea typeface="Amiri" pitchFamily="2" charset="-78"/>
                 <a:cs typeface="Amiri" pitchFamily="2" charset="-78"/>
               </a:rPr>
               <a:t>كَيْفَ كَانَتِ العَلَاقَةُ بَيْنَ الجِيرَانِ فِي أَيَّامِ أَجْدَادِكَ؟</a:t>
@@ -19740,6 +19893,7 @@
                   <a:srgbClr val="1B3B6F"/>
                 </a:solidFill>
                 <a:latin typeface="Amiri" pitchFamily="2" charset="-78"/>
+                <a:ea typeface="Amiri" pitchFamily="2" charset="-78"/>
                 <a:cs typeface="Amiri" pitchFamily="2" charset="-78"/>
               </a:rPr>
               <a:t>جَارُنَا … الَّذِي … عَلَّمَنِي …</a:t>
@@ -19816,6 +19970,7 @@
                   <a:srgbClr val="1B3B6F"/>
                 </a:solidFill>
                 <a:latin typeface="Amiri" pitchFamily="2" charset="-78"/>
+                <a:ea typeface="Amiri" pitchFamily="2" charset="-78"/>
                 <a:cs typeface="Amiri" pitchFamily="2" charset="-78"/>
               </a:rPr>
               <a:t>صِفْ جَارًا أَثَّرَ فِي حَيَاتِكَ.</a:t>
@@ -19919,6 +20074,7 @@
                   <a:srgbClr val="1B3B6F"/>
                 </a:solidFill>
                 <a:latin typeface="Amiri" pitchFamily="2" charset="-78"/>
+                <a:ea typeface="Amiri" pitchFamily="2" charset="-78"/>
                 <a:cs typeface="Amiri" pitchFamily="2" charset="-78"/>
               </a:rPr>
               <a:t>لَوِ انْتَقَلْتُ …، لَطَرَقْتُ …</a:t>
@@ -19995,6 +20151,7 @@
                   <a:srgbClr val="1B3B6F"/>
                 </a:solidFill>
                 <a:latin typeface="Amiri" pitchFamily="2" charset="-78"/>
+                <a:ea typeface="Amiri" pitchFamily="2" charset="-78"/>
                 <a:cs typeface="Amiri" pitchFamily="2" charset="-78"/>
               </a:rPr>
               <a:t>لَوِ انْتَقَلْتَ إِلَى بَلَدٍ جَدِيدٍ، كَيْفَ تَتَعَرَّفُ عَلَى جِيرَانِكَ؟</a:t>
@@ -20204,6 +20361,7 @@
                   <a:srgbClr val="D4AF37"/>
                 </a:solidFill>
                 <a:latin typeface="Amiri" pitchFamily="2" charset="-78"/>
+                <a:ea typeface="Amiri" pitchFamily="2" charset="-78"/>
                 <a:cs typeface="Amiri" pitchFamily="2" charset="-78"/>
               </a:rPr>
               <a:t>م</a:t>
@@ -20524,6 +20682,7 @@
                   <a:srgbClr val="8A6D1E"/>
                 </a:solidFill>
                 <a:latin typeface="Amiri" pitchFamily="2" charset="-78"/>
+                <a:ea typeface="Amiri" pitchFamily="2" charset="-78"/>
                 <a:cs typeface="Amiri" pitchFamily="2" charset="-78"/>
               </a:rPr>
               <a:t>آدَابُ الصَّفِّ</a:t>
@@ -22055,6 +22214,7 @@
                   <a:srgbClr val="D4AF37"/>
                 </a:solidFill>
                 <a:latin typeface="Amiri" pitchFamily="2" charset="-78"/>
+                <a:ea typeface="Amiri" pitchFamily="2" charset="-78"/>
                 <a:cs typeface="Amiri" pitchFamily="2" charset="-78"/>
               </a:rPr>
               <a:t>م</a:t>
@@ -22375,6 +22535,7 @@
                   <a:srgbClr val="8A6D1E"/>
                 </a:solidFill>
                 <a:latin typeface="Amiri" pitchFamily="2" charset="-78"/>
+                <a:ea typeface="Amiri" pitchFamily="2" charset="-78"/>
                 <a:cs typeface="Amiri" pitchFamily="2" charset="-78"/>
               </a:rPr>
               <a:t>نَمُوذَجُ الإِجَابَةِ</a:t>
@@ -22617,6 +22778,7 @@
                   <a:srgbClr val="1B3B6F"/>
                 </a:solidFill>
                 <a:latin typeface="Amiri" pitchFamily="2" charset="-78"/>
+                <a:ea typeface="Amiri" pitchFamily="2" charset="-78"/>
                 <a:cs typeface="Amiri" pitchFamily="2" charset="-78"/>
               </a:rPr>
               <a:t>جِيرَانُنَا أُسْرَةٌ بَاكِسْتَانِيَّةٌ، عِنْدَهُمْ وَلَدَانِ.</a:t>
@@ -22693,6 +22855,7 @@
                   <a:srgbClr val="1B3B6F"/>
                 </a:solidFill>
                 <a:latin typeface="Amiri" pitchFamily="2" charset="-78"/>
+                <a:ea typeface="Amiri" pitchFamily="2" charset="-78"/>
                 <a:cs typeface="Amiri" pitchFamily="2" charset="-78"/>
               </a:rPr>
               <a:t>مَنْ جِيرَانُكَ؟</a:t>
@@ -22796,6 +22959,7 @@
                   <a:srgbClr val="1B3B6F"/>
                 </a:solidFill>
                 <a:latin typeface="Amiri" pitchFamily="2" charset="-78"/>
+                <a:ea typeface="Amiri" pitchFamily="2" charset="-78"/>
                 <a:cs typeface="Amiri" pitchFamily="2" charset="-78"/>
               </a:rPr>
               <a:t>جَارَتُنَا عَجُوزٌ لَطِيفَةٌ، وَشَعْرُهَا أَبْيَضُ.</a:t>
@@ -22872,6 +23036,7 @@
                   <a:srgbClr val="1B3B6F"/>
                 </a:solidFill>
                 <a:latin typeface="Amiri" pitchFamily="2" charset="-78"/>
+                <a:ea typeface="Amiri" pitchFamily="2" charset="-78"/>
                 <a:cs typeface="Amiri" pitchFamily="2" charset="-78"/>
               </a:rPr>
               <a:t>صِفْ أَحَدَ جِيرَانِكَ.</a:t>
@@ -22975,6 +23140,7 @@
                   <a:srgbClr val="1B3B6F"/>
                 </a:solidFill>
                 <a:latin typeface="Amiri" pitchFamily="2" charset="-78"/>
+                <a:ea typeface="Amiri" pitchFamily="2" charset="-78"/>
                 <a:cs typeface="Amiri" pitchFamily="2" charset="-78"/>
               </a:rPr>
               <a:t>بَيْتُنَا أَبْيَضُ، وَبَابُهُ أَزْرَقُ.</a:t>
@@ -23051,6 +23217,7 @@
                   <a:srgbClr val="1B3B6F"/>
                 </a:solidFill>
                 <a:latin typeface="Amiri" pitchFamily="2" charset="-78"/>
+                <a:ea typeface="Amiri" pitchFamily="2" charset="-78"/>
                 <a:cs typeface="Amiri" pitchFamily="2" charset="-78"/>
               </a:rPr>
               <a:t>مَا لَوْنُ بَيْتِكُمْ؟</a:t>
@@ -23154,6 +23321,7 @@
                   <a:srgbClr val="1B3B6F"/>
                 </a:solidFill>
                 <a:latin typeface="Amiri" pitchFamily="2" charset="-78"/>
+                <a:ea typeface="Amiri" pitchFamily="2" charset="-78"/>
                 <a:cs typeface="Amiri" pitchFamily="2" charset="-78"/>
               </a:rPr>
               <a:t>نَلْعَبُ كُرَةَ السَّلَّةِ فِي الحَدِيقَةِ بَعْدَ المَدْرَسَةِ.</a:t>
@@ -23230,6 +23398,7 @@
                   <a:srgbClr val="1B3B6F"/>
                 </a:solidFill>
                 <a:latin typeface="Amiri" pitchFamily="2" charset="-78"/>
+                <a:ea typeface="Amiri" pitchFamily="2" charset="-78"/>
                 <a:cs typeface="Amiri" pitchFamily="2" charset="-78"/>
               </a:rPr>
               <a:t>مَاذَا تَفْعَلُ مَعَ أَصْدِقَائِكَ فِي الحَيِّ؟</a:t>
@@ -23333,6 +23502,7 @@
                   <a:srgbClr val="1B3B6F"/>
                 </a:solidFill>
                 <a:latin typeface="Amiri" pitchFamily="2" charset="-78"/>
+                <a:ea typeface="Amiri" pitchFamily="2" charset="-78"/>
                 <a:cs typeface="Amiri" pitchFamily="2" charset="-78"/>
               </a:rPr>
               <a:t>نَعَمْ، دَعَوْنَاهُمْ إِلَى الإِفْطَارِ فِي رَمَضَانَ.</a:t>
@@ -23409,6 +23579,7 @@
                   <a:srgbClr val="1B3B6F"/>
                 </a:solidFill>
                 <a:latin typeface="Amiri" pitchFamily="2" charset="-78"/>
+                <a:ea typeface="Amiri" pitchFamily="2" charset="-78"/>
                 <a:cs typeface="Amiri" pitchFamily="2" charset="-78"/>
               </a:rPr>
               <a:t>هَلْ دَعَوْتَ جِيرَانَكَ إِلَى بَيْتِكُمْ؟</a:t>
@@ -23618,6 +23789,7 @@
                   <a:srgbClr val="D4AF37"/>
                 </a:solidFill>
                 <a:latin typeface="Amiri" pitchFamily="2" charset="-78"/>
+                <a:ea typeface="Amiri" pitchFamily="2" charset="-78"/>
                 <a:cs typeface="Amiri" pitchFamily="2" charset="-78"/>
               </a:rPr>
               <a:t>م</a:t>
@@ -23938,6 +24110,7 @@
                   <a:srgbClr val="8A6D1E"/>
                 </a:solidFill>
                 <a:latin typeface="Amiri" pitchFamily="2" charset="-78"/>
+                <a:ea typeface="Amiri" pitchFamily="2" charset="-78"/>
                 <a:cs typeface="Amiri" pitchFamily="2" charset="-78"/>
               </a:rPr>
               <a:t>نَمُوذَجُ الإِجَابَةِ</a:t>
@@ -24180,6 +24353,7 @@
                   <a:srgbClr val="1B3B6F"/>
                 </a:solidFill>
                 <a:latin typeface="Amiri" pitchFamily="2" charset="-78"/>
+                <a:ea typeface="Amiri" pitchFamily="2" charset="-78"/>
                 <a:cs typeface="Amiri" pitchFamily="2" charset="-78"/>
               </a:rPr>
               <a:t>شَارِعِي طَوِيلٌ وَهَادِئٌ، فِيهِ عِشْرُونَ بَيْتًا، وَالبُيُوتُ قَدِيمَةٌ وَمَصْنُوعَةٌ مِنَ الطُّوبِ الأَحْمَرِ.</a:t>
@@ -24256,6 +24430,7 @@
                   <a:srgbClr val="1B3B6F"/>
                 </a:solidFill>
                 <a:latin typeface="Amiri" pitchFamily="2" charset="-78"/>
+                <a:ea typeface="Amiri" pitchFamily="2" charset="-78"/>
                 <a:cs typeface="Amiri" pitchFamily="2" charset="-78"/>
               </a:rPr>
               <a:t>صِفْ شَارِعَكَ وَبُيُوتَهُ.</a:t>
@@ -24359,6 +24534,7 @@
                   <a:srgbClr val="1B3B6F"/>
                 </a:solidFill>
                 <a:latin typeface="Amiri" pitchFamily="2" charset="-78"/>
+                <a:ea typeface="Amiri" pitchFamily="2" charset="-78"/>
                 <a:cs typeface="Amiri" pitchFamily="2" charset="-78"/>
               </a:rPr>
               <a:t>نَعَمْ، ابْنُ جِيرَانِنَا اسْمُهُ عَلِيٌّ، وَهُوَ مَرِحٌ، وَنَلْعَبُ أَلْعَابَ الفِيدْيُو مَعًا أَحْيَانًا.</a:t>
@@ -24435,6 +24611,7 @@
                   <a:srgbClr val="1B3B6F"/>
                 </a:solidFill>
                 <a:latin typeface="Amiri" pitchFamily="2" charset="-78"/>
+                <a:ea typeface="Amiri" pitchFamily="2" charset="-78"/>
                 <a:cs typeface="Amiri" pitchFamily="2" charset="-78"/>
               </a:rPr>
               <a:t>هَلْ عِنْدَكَ صَدِيقٌ مِنْ جِيرَانِكَ؟ صِفْهُ.</a:t>
@@ -24538,6 +24715,7 @@
                   <a:srgbClr val="1B3B6F"/>
                 </a:solidFill>
                 <a:latin typeface="Amiri" pitchFamily="2" charset="-78"/>
+                <a:ea typeface="Amiri" pitchFamily="2" charset="-78"/>
                 <a:cs typeface="Amiri" pitchFamily="2" charset="-78"/>
               </a:rPr>
               <a:t>أَوَّلًا أَخَذْنَا لَهُمْ كَعْكَةً، ثُمَّ سَاعَدْنَاهُمْ فِي نَقْلِ الأَثَاثِ.</a:t>
@@ -24614,6 +24792,7 @@
                   <a:srgbClr val="1B3B6F"/>
                 </a:solidFill>
                 <a:latin typeface="Amiri" pitchFamily="2" charset="-78"/>
+                <a:ea typeface="Amiri" pitchFamily="2" charset="-78"/>
                 <a:cs typeface="Amiri" pitchFamily="2" charset="-78"/>
               </a:rPr>
               <a:t>كَيْفَ رَحَّبْتُمْ بِجِيرَانٍ جُدُدٍ؟</a:t>
@@ -24717,6 +24896,7 @@
                   <a:srgbClr val="1B3B6F"/>
                 </a:solidFill>
                 <a:latin typeface="Amiri" pitchFamily="2" charset="-78"/>
+                <a:ea typeface="Amiri" pitchFamily="2" charset="-78"/>
                 <a:cs typeface="Amiri" pitchFamily="2" charset="-78"/>
               </a:rPr>
               <a:t>أُحِبُّ الحَدِيقَةَ وَالمَكْتَبَةَ القَرِيبَتَيْنِ، لٰكِنِّي لَا أُحِبُّ الضَّجِيجَ فِي اللَّيْلِ.</a:t>
@@ -24793,6 +24973,7 @@
                   <a:srgbClr val="1B3B6F"/>
                 </a:solidFill>
                 <a:latin typeface="Amiri" pitchFamily="2" charset="-78"/>
+                <a:ea typeface="Amiri" pitchFamily="2" charset="-78"/>
                 <a:cs typeface="Amiri" pitchFamily="2" charset="-78"/>
               </a:rPr>
               <a:t>مَا الَّذِي تُحِبُّهُ وَمَا الَّذِي لَا تُحِبُّهُ فِي حَيِّكَ؟</a:t>
@@ -24896,6 +25077,7 @@
                   <a:srgbClr val="1B3B6F"/>
                 </a:solidFill>
                 <a:latin typeface="Amiri" pitchFamily="2" charset="-78"/>
+                <a:ea typeface="Amiri" pitchFamily="2" charset="-78"/>
                 <a:cs typeface="Amiri" pitchFamily="2" charset="-78"/>
               </a:rPr>
               <a:t>أُرِيدُ أَنْ أَسْكُنَ فِي حَيٍّ قَرِيبٍ مِنْ أُسْرَتِي، لِأَنِّي أُرِيدُ أَنْ أَزُورَهُمْ كُلَّ أُسْبُوعٍ.</a:t>
@@ -24972,6 +25154,7 @@
                   <a:srgbClr val="1B3B6F"/>
                 </a:solidFill>
                 <a:latin typeface="Amiri" pitchFamily="2" charset="-78"/>
+                <a:ea typeface="Amiri" pitchFamily="2" charset="-78"/>
                 <a:cs typeface="Amiri" pitchFamily="2" charset="-78"/>
               </a:rPr>
               <a:t>أَيْنَ تُرِيدُ أَنْ تَسْكُنَ فِي المُسْتَقْبَلِ؟</a:t>
@@ -25181,6 +25364,7 @@
                   <a:srgbClr val="D4AF37"/>
                 </a:solidFill>
                 <a:latin typeface="Amiri" pitchFamily="2" charset="-78"/>
+                <a:ea typeface="Amiri" pitchFamily="2" charset="-78"/>
                 <a:cs typeface="Amiri" pitchFamily="2" charset="-78"/>
               </a:rPr>
               <a:t>م</a:t>
@@ -25501,6 +25685,7 @@
                   <a:srgbClr val="8A6D1E"/>
                 </a:solidFill>
                 <a:latin typeface="Amiri" pitchFamily="2" charset="-78"/>
+                <a:ea typeface="Amiri" pitchFamily="2" charset="-78"/>
                 <a:cs typeface="Amiri" pitchFamily="2" charset="-78"/>
               </a:rPr>
               <a:t>نَمُوذَجُ الإِجَابَةِ</a:t>
@@ -25743,6 +25928,7 @@
                   <a:srgbClr val="1B3B6F"/>
                 </a:solidFill>
                 <a:latin typeface="Amiri" pitchFamily="2" charset="-78"/>
+                <a:ea typeface="Amiri" pitchFamily="2" charset="-78"/>
                 <a:cs typeface="Amiri" pitchFamily="2" charset="-78"/>
               </a:rPr>
               <a:t>لِأَنَّ الجَارَ السَّيِّئَ يُفْسِدُ أَجْمَلَ بَيْتٍ، فَمَهْمَا كَانَ البَيْتُ وَاسِعًا، لَا تَرْتَاحُ إِذَا كَانَتْ بَيْنَكَ وَبَيْنَ جَارِكَ مَشَاكِلُ.</a:t>
@@ -25819,6 +26005,7 @@
                   <a:srgbClr val="1B3B6F"/>
                 </a:solidFill>
                 <a:latin typeface="Amiri" pitchFamily="2" charset="-78"/>
+                <a:ea typeface="Amiri" pitchFamily="2" charset="-78"/>
                 <a:cs typeface="Amiri" pitchFamily="2" charset="-78"/>
               </a:rPr>
               <a:t>لِمَاذَا يَقُولُ المَثَلُ «الجَارُ قَبْلَ الدَّارِ»؟</a:t>
@@ -25922,6 +26109,7 @@
                   <a:srgbClr val="1B3B6F"/>
                 </a:solidFill>
                 <a:latin typeface="Amiri" pitchFamily="2" charset="-78"/>
+                <a:ea typeface="Amiri" pitchFamily="2" charset="-78"/>
                 <a:cs typeface="Amiri" pitchFamily="2" charset="-78"/>
               </a:rPr>
               <a:t>صَحِيحٌ أَنَّ النَّاسَ فِي المُدُنِ مَشْغُولُونَ، غَيْرَ أَنَّ المَسَاجِدَ وَالنَّوَادِيَ تَجْمَعُهُمْ إِذَا أَرَادُوا.</a:t>
@@ -25998,6 +26186,7 @@
                   <a:srgbClr val="1B3B6F"/>
                 </a:solidFill>
                 <a:latin typeface="Amiri" pitchFamily="2" charset="-78"/>
+                <a:ea typeface="Amiri" pitchFamily="2" charset="-78"/>
                 <a:cs typeface="Amiri" pitchFamily="2" charset="-78"/>
               </a:rPr>
               <a:t>هَلِ المُدُنُ الكَبِيرَةُ تَجْعَلُ النَّاسَ أَكْثَرَ وَحْدَةً؟</a:t>
@@ -26101,6 +26290,7 @@
                   <a:srgbClr val="1B3B6F"/>
                 </a:solidFill>
                 <a:latin typeface="Amiri" pitchFamily="2" charset="-78"/>
+                <a:ea typeface="Amiri" pitchFamily="2" charset="-78"/>
                 <a:cs typeface="Amiri" pitchFamily="2" charset="-78"/>
               </a:rPr>
               <a:t>كَانَ الجِيرَانُ يُرَبُّونَ الأَطْفَالَ مَعًا، فَكُلُّ أُمٍّ فِي الحَيِّ أُمٌّ لِلْجَمِيعِ، أَمَّا اليَوْمَ فَتُغْلِقُ كُلُّ أُسْرَةٍ بَابَهَا.</a:t>
@@ -26180,6 +26370,7 @@
                   <a:srgbClr val="1B3B6F"/>
                 </a:solidFill>
                 <a:latin typeface="Amiri" pitchFamily="2" charset="-78"/>
+                <a:ea typeface="Amiri" pitchFamily="2" charset="-78"/>
                 <a:cs typeface="Amiri" pitchFamily="2" charset="-78"/>
               </a:rPr>
               <a:t>كَيْفَ كَانَتِ العَلَاقَةُ بَيْنَ الجِيرَانِ فِي أَيَّامِ أَجْدَادِكَ؟</a:t>
@@ -26389,6 +26580,7 @@
                   <a:srgbClr val="D4AF37"/>
                 </a:solidFill>
                 <a:latin typeface="Amiri" pitchFamily="2" charset="-78"/>
+                <a:ea typeface="Amiri" pitchFamily="2" charset="-78"/>
                 <a:cs typeface="Amiri" pitchFamily="2" charset="-78"/>
               </a:rPr>
               <a:t>م</a:t>
@@ -26709,6 +26901,7 @@
                   <a:srgbClr val="8A6D1E"/>
                 </a:solidFill>
                 <a:latin typeface="Amiri" pitchFamily="2" charset="-78"/>
+                <a:ea typeface="Amiri" pitchFamily="2" charset="-78"/>
                 <a:cs typeface="Amiri" pitchFamily="2" charset="-78"/>
               </a:rPr>
               <a:t>نَمُوذَجُ الإِجَابَةِ</a:t>
@@ -26951,6 +27144,7 @@
                   <a:srgbClr val="1B3B6F"/>
                 </a:solidFill>
                 <a:latin typeface="Amiri" pitchFamily="2" charset="-78"/>
+                <a:ea typeface="Amiri" pitchFamily="2" charset="-78"/>
                 <a:cs typeface="Amiri" pitchFamily="2" charset="-78"/>
               </a:rPr>
               <a:t>جَارُنَا الأُسْتَاذُ حَسَنٌ، الَّذِي كَانَ مُعَلِّمًا قَبْلَ تَقَاعُدِهِ، عَلَّمَنِي الشِّطْرَنْجَ وَحُبَّ الكُتُبِ.</a:t>
@@ -27027,6 +27221,7 @@
                   <a:srgbClr val="1B3B6F"/>
                 </a:solidFill>
                 <a:latin typeface="Amiri" pitchFamily="2" charset="-78"/>
+                <a:ea typeface="Amiri" pitchFamily="2" charset="-78"/>
                 <a:cs typeface="Amiri" pitchFamily="2" charset="-78"/>
               </a:rPr>
               <a:t>صِفْ جَارًا أَثَّرَ فِي حَيَاتِكَ.</a:t>
@@ -27130,6 +27325,7 @@
                   <a:srgbClr val="1B3B6F"/>
                 </a:solidFill>
                 <a:latin typeface="Amiri" pitchFamily="2" charset="-78"/>
+                <a:ea typeface="Amiri" pitchFamily="2" charset="-78"/>
                 <a:cs typeface="Amiri" pitchFamily="2" charset="-78"/>
               </a:rPr>
               <a:t>لَوِ انْتَقَلْتُ إِلَى بَلَدٍ جَدِيدٍ، لَطَرَقْتُ أَبْوَابَ جِيرَانِي، وَلَقَدَّمْتُ لَهُمْ حَلَوِيَّاتٍ مِنْ بَلَدِي.</a:t>
@@ -27209,6 +27405,7 @@
                   <a:srgbClr val="1B3B6F"/>
                 </a:solidFill>
                 <a:latin typeface="Amiri" pitchFamily="2" charset="-78"/>
+                <a:ea typeface="Amiri" pitchFamily="2" charset="-78"/>
                 <a:cs typeface="Amiri" pitchFamily="2" charset="-78"/>
               </a:rPr>
               <a:t>لَوِ انْتَقَلْتَ إِلَى بَلَدٍ جَدِيدٍ، كَيْفَ تَتَعَرَّفُ عَلَى جِيرَانِكَ؟</a:t>
@@ -27418,6 +27615,7 @@
                   <a:srgbClr val="D4AF37"/>
                 </a:solidFill>
                 <a:latin typeface="Amiri" pitchFamily="2" charset="-78"/>
+                <a:ea typeface="Amiri" pitchFamily="2" charset="-78"/>
                 <a:cs typeface="Amiri" pitchFamily="2" charset="-78"/>
               </a:rPr>
               <a:t>م</a:t>
@@ -27738,6 +27936,7 @@
                   <a:srgbClr val="8A6D1E"/>
                 </a:solidFill>
                 <a:latin typeface="Amiri" pitchFamily="2" charset="-78"/>
+                <a:ea typeface="Amiri" pitchFamily="2" charset="-78"/>
                 <a:cs typeface="Amiri" pitchFamily="2" charset="-78"/>
               </a:rPr>
               <a:t>قَيِّمْ عَمَلَكَ</a:t>
@@ -28982,6 +29181,7 @@
                   <a:srgbClr val="FFFFFF"/>
                 </a:solidFill>
                 <a:latin typeface="Amiri" pitchFamily="2" charset="-78"/>
+                <a:ea typeface="Amiri" pitchFamily="2" charset="-78"/>
                 <a:cs typeface="Amiri" pitchFamily="2" charset="-78"/>
               </a:rPr>
               <a:t>أَحْسَنْتُمْ! إِلَى اللِّقَاءِ</a:t>
@@ -29134,6 +29334,7 @@
                   <a:srgbClr val="D4AF37"/>
                 </a:solidFill>
                 <a:latin typeface="Amiri" pitchFamily="2" charset="-78"/>
+                <a:ea typeface="Amiri" pitchFamily="2" charset="-78"/>
                 <a:cs typeface="Amiri" pitchFamily="2" charset="-78"/>
               </a:rPr>
               <a:t>وَرْشَةُ الكِتَابَةِ</a:t>
@@ -29267,6 +29468,7 @@
                   <a:srgbClr val="D4AF37"/>
                 </a:solidFill>
                 <a:latin typeface="Amiri" pitchFamily="2" charset="-78"/>
+                <a:ea typeface="Amiri" pitchFamily="2" charset="-78"/>
                 <a:cs typeface="Amiri" pitchFamily="2" charset="-78"/>
               </a:rPr>
               <a:t>م</a:t>
@@ -29587,6 +29789,7 @@
                   <a:srgbClr val="8A6D1E"/>
                 </a:solidFill>
                 <a:latin typeface="Amiri" pitchFamily="2" charset="-78"/>
+                <a:ea typeface="Amiri" pitchFamily="2" charset="-78"/>
                 <a:cs typeface="Amiri" pitchFamily="2" charset="-78"/>
               </a:rPr>
               <a:t>خَرِيطَةُ الوَرْشَةِ</a:t>
@@ -29901,6 +30104,7 @@
                   <a:srgbClr val="1B3B6F"/>
                 </a:solidFill>
                 <a:latin typeface="Amiri" pitchFamily="2" charset="-78"/>
+                <a:ea typeface="Amiri" pitchFamily="2" charset="-78"/>
                 <a:cs typeface="Amiri" pitchFamily="2" charset="-78"/>
               </a:rPr>
               <a:t>كَيْفَ</a:t>
@@ -30177,6 +30381,7 @@
                   <a:srgbClr val="1E6B52"/>
                 </a:solidFill>
                 <a:latin typeface="Amiri" pitchFamily="2" charset="-78"/>
+                <a:ea typeface="Amiri" pitchFamily="2" charset="-78"/>
                 <a:cs typeface="Amiri" pitchFamily="2" charset="-78"/>
               </a:rPr>
               <a:t>تَمْثِيلُ الدَّوْرِ</a:t>
@@ -30453,6 +30658,7 @@
                   <a:srgbClr val="8A6D1E"/>
                 </a:solidFill>
                 <a:latin typeface="Amiri" pitchFamily="2" charset="-78"/>
+                <a:ea typeface="Amiri" pitchFamily="2" charset="-78"/>
                 <a:cs typeface="Amiri" pitchFamily="2" charset="-78"/>
               </a:rPr>
               <a:t>النَّمُوذَجُ</a:t>
@@ -30729,6 +30935,7 @@
                   <a:srgbClr val="1E6B52"/>
                 </a:solidFill>
                 <a:latin typeface="Amiri" pitchFamily="2" charset="-78"/>
+                <a:ea typeface="Amiri" pitchFamily="2" charset="-78"/>
                 <a:cs typeface="Amiri" pitchFamily="2" charset="-78"/>
               </a:rPr>
               <a:t>المُحَادَثَةُ</a:t>
@@ -31005,6 +31212,7 @@
                   <a:srgbClr val="8A6D1E"/>
                 </a:solidFill>
                 <a:latin typeface="Amiri" pitchFamily="2" charset="-78"/>
+                <a:ea typeface="Amiri" pitchFamily="2" charset="-78"/>
                 <a:cs typeface="Amiri" pitchFamily="2" charset="-78"/>
               </a:rPr>
               <a:t>قَيِّمْ</a:t>
@@ -31248,6 +31456,7 @@
                   <a:srgbClr val="D4AF37"/>
                 </a:solidFill>
                 <a:latin typeface="Amiri" pitchFamily="2" charset="-78"/>
+                <a:ea typeface="Amiri" pitchFamily="2" charset="-78"/>
                 <a:cs typeface="Amiri" pitchFamily="2" charset="-78"/>
               </a:rPr>
               <a:t>م</a:t>
@@ -31568,6 +31777,7 @@
                   <a:srgbClr val="8A6D1E"/>
                 </a:solidFill>
                 <a:latin typeface="Amiri" pitchFamily="2" charset="-78"/>
+                <a:ea typeface="Amiri" pitchFamily="2" charset="-78"/>
                 <a:cs typeface="Amiri" pitchFamily="2" charset="-78"/>
               </a:rPr>
               <a:t>امْتِحَانُ التَّحَدُّثِ</a:t>
@@ -32192,6 +32402,7 @@
                   <a:srgbClr val="1B3B6F"/>
                 </a:solidFill>
                 <a:latin typeface="Amiri" pitchFamily="2" charset="-78"/>
+                <a:ea typeface="Amiri" pitchFamily="2" charset="-78"/>
                 <a:cs typeface="Amiri" pitchFamily="2" charset="-78"/>
               </a:rPr>
               <a:t>عَفْوًا، هَلْ يُمْكِنُ أَنْ تُعِيدَ السُّؤَالَ؟</a:t>
@@ -32291,6 +32502,7 @@
                   <a:srgbClr val="1B3B6F"/>
                 </a:solidFill>
                 <a:latin typeface="Amiri" pitchFamily="2" charset="-78"/>
+                <a:ea typeface="Amiri" pitchFamily="2" charset="-78"/>
                 <a:cs typeface="Amiri" pitchFamily="2" charset="-78"/>
               </a:rPr>
               <a:t>لَحْظَةً، دَعْنِي أُفَكِّرُ …</a:t>
@@ -32390,6 +32602,7 @@
                   <a:srgbClr val="1B3B6F"/>
                 </a:solidFill>
                 <a:latin typeface="Amiri" pitchFamily="2" charset="-78"/>
+                <a:ea typeface="Amiri" pitchFamily="2" charset="-78"/>
                 <a:cs typeface="Amiri" pitchFamily="2" charset="-78"/>
               </a:rPr>
               <a:t>أَقْصِدُ …</a:t>
@@ -32561,6 +32774,7 @@
                   <a:srgbClr val="D4AF37"/>
                 </a:solidFill>
                 <a:latin typeface="Amiri" pitchFamily="2" charset="-78"/>
+                <a:ea typeface="Amiri" pitchFamily="2" charset="-78"/>
                 <a:cs typeface="Amiri" pitchFamily="2" charset="-78"/>
               </a:rPr>
               <a:t>م</a:t>
@@ -32881,6 +33095,7 @@
                   <a:srgbClr val="8A6D1E"/>
                 </a:solidFill>
                 <a:latin typeface="Amiri" pitchFamily="2" charset="-78"/>
+                <a:ea typeface="Amiri" pitchFamily="2" charset="-78"/>
                 <a:cs typeface="Amiri" pitchFamily="2" charset="-78"/>
               </a:rPr>
               <a:t>مَنْ هُوَ؟ مَنْ هِيَ؟</a:t>
@@ -33184,6 +33399,7 @@
                   <a:srgbClr val="1B3B6F"/>
                 </a:solidFill>
                 <a:latin typeface="Amiri" pitchFamily="2" charset="-78"/>
+                <a:ea typeface="Amiri" pitchFamily="2" charset="-78"/>
                 <a:cs typeface="Amiri" pitchFamily="2" charset="-78"/>
               </a:rPr>
               <a:t>جَارٌ</a:t>
@@ -33341,6 +33557,7 @@
                   <a:srgbClr val="1B3B6F"/>
                 </a:solidFill>
                 <a:latin typeface="Amiri" pitchFamily="2" charset="-78"/>
+                <a:ea typeface="Amiri" pitchFamily="2" charset="-78"/>
                 <a:cs typeface="Amiri" pitchFamily="2" charset="-78"/>
               </a:rPr>
               <a:t>جِيرَانٌ</a:t>
@@ -33444,6 +33661,7 @@
                   <a:srgbClr val="1B3B6F"/>
                 </a:solidFill>
                 <a:latin typeface="Amiri" pitchFamily="2" charset="-78"/>
+                <a:ea typeface="Amiri" pitchFamily="2" charset="-78"/>
                 <a:cs typeface="Amiri" pitchFamily="2" charset="-78"/>
               </a:rPr>
               <a:t>جَارَةٌ</a:t>
@@ -33547,6 +33765,7 @@
                   <a:srgbClr val="1B3B6F"/>
                 </a:solidFill>
                 <a:latin typeface="Amiri" pitchFamily="2" charset="-78"/>
+                <a:ea typeface="Amiri" pitchFamily="2" charset="-78"/>
                 <a:cs typeface="Amiri" pitchFamily="2" charset="-78"/>
               </a:rPr>
               <a:t>جَارٌ</a:t>
@@ -33812,6 +34031,7 @@
                   <a:srgbClr val="1B3B6F"/>
                 </a:solidFill>
                 <a:latin typeface="Amiri" pitchFamily="2" charset="-78"/>
+                <a:ea typeface="Amiri" pitchFamily="2" charset="-78"/>
                 <a:cs typeface="Amiri" pitchFamily="2" charset="-78"/>
               </a:rPr>
               <a:t>انْتَقَلُوا إِلَى …</a:t>
@@ -33969,6 +34189,7 @@
                   <a:srgbClr val="1B3B6F"/>
                 </a:solidFill>
                 <a:latin typeface="Amiri" pitchFamily="2" charset="-78"/>
+                <a:ea typeface="Amiri" pitchFamily="2" charset="-78"/>
                 <a:cs typeface="Amiri" pitchFamily="2" charset="-78"/>
               </a:rPr>
               <a:t>انْتَقَلْنَا</a:t>
@@ -34072,6 +34293,7 @@
                   <a:srgbClr val="1B3B6F"/>
                 </a:solidFill>
                 <a:latin typeface="Amiri" pitchFamily="2" charset="-78"/>
+                <a:ea typeface="Amiri" pitchFamily="2" charset="-78"/>
                 <a:cs typeface="Amiri" pitchFamily="2" charset="-78"/>
               </a:rPr>
               <a:t>انْتَقَلَتْ</a:t>
@@ -34175,6 +34397,7 @@
                   <a:srgbClr val="1B3B6F"/>
                 </a:solidFill>
                 <a:latin typeface="Amiri" pitchFamily="2" charset="-78"/>
+                <a:ea typeface="Amiri" pitchFamily="2" charset="-78"/>
                 <a:cs typeface="Amiri" pitchFamily="2" charset="-78"/>
               </a:rPr>
               <a:t>انْتَقَلَ</a:t>
@@ -34440,6 +34663,7 @@
                   <a:srgbClr val="1B3B6F"/>
                 </a:solidFill>
                 <a:latin typeface="Amiri" pitchFamily="2" charset="-78"/>
+                <a:ea typeface="Amiri" pitchFamily="2" charset="-78"/>
                 <a:cs typeface="Amiri" pitchFamily="2" charset="-78"/>
               </a:rPr>
               <a:t>يَبْدُو …</a:t>
@@ -34597,6 +34821,7 @@
                   <a:srgbClr val="1B3B6F"/>
                 </a:solidFill>
                 <a:latin typeface="Amiri" pitchFamily="2" charset="-78"/>
+                <a:ea typeface="Amiri" pitchFamily="2" charset="-78"/>
                 <a:cs typeface="Amiri" pitchFamily="2" charset="-78"/>
               </a:rPr>
               <a:t>يَبْدُونَ</a:t>
@@ -34700,6 +34925,7 @@
                   <a:srgbClr val="1B3B6F"/>
                 </a:solidFill>
                 <a:latin typeface="Amiri" pitchFamily="2" charset="-78"/>
+                <a:ea typeface="Amiri" pitchFamily="2" charset="-78"/>
                 <a:cs typeface="Amiri" pitchFamily="2" charset="-78"/>
               </a:rPr>
               <a:t>تَبْدُو</a:t>
@@ -34965,6 +35191,7 @@
                   <a:srgbClr val="1B3B6F"/>
                 </a:solidFill>
                 <a:latin typeface="Amiri" pitchFamily="2" charset="-78"/>
+                <a:ea typeface="Amiri" pitchFamily="2" charset="-78"/>
                 <a:cs typeface="Amiri" pitchFamily="2" charset="-78"/>
               </a:rPr>
               <a:t>عِنْدَهُمْ …</a:t>
@@ -35122,6 +35349,7 @@
                   <a:srgbClr val="1B3B6F"/>
                 </a:solidFill>
                 <a:latin typeface="Amiri" pitchFamily="2" charset="-78"/>
+                <a:ea typeface="Amiri" pitchFamily="2" charset="-78"/>
                 <a:cs typeface="Amiri" pitchFamily="2" charset="-78"/>
               </a:rPr>
               <a:t>عِنْدَنَا</a:t>
@@ -35225,6 +35453,7 @@
                   <a:srgbClr val="1B3B6F"/>
                 </a:solidFill>
                 <a:latin typeface="Amiri" pitchFamily="2" charset="-78"/>
+                <a:ea typeface="Amiri" pitchFamily="2" charset="-78"/>
                 <a:cs typeface="Amiri" pitchFamily="2" charset="-78"/>
               </a:rPr>
               <a:t>عِنْدَهَا</a:t>
@@ -35328,6 +35557,7 @@
                   <a:srgbClr val="1B3B6F"/>
                 </a:solidFill>
                 <a:latin typeface="Amiri" pitchFamily="2" charset="-78"/>
+                <a:ea typeface="Amiri" pitchFamily="2" charset="-78"/>
                 <a:cs typeface="Amiri" pitchFamily="2" charset="-78"/>
               </a:rPr>
               <a:t>عِنْدَهُ</a:t>
@@ -35593,6 +35823,7 @@
                   <a:srgbClr val="1B3B6F"/>
                 </a:solidFill>
                 <a:latin typeface="Amiri" pitchFamily="2" charset="-78"/>
+                <a:ea typeface="Amiri" pitchFamily="2" charset="-78"/>
                 <a:cs typeface="Amiri" pitchFamily="2" charset="-78"/>
               </a:rPr>
               <a:t>أَوْلَادُهُمْ</a:t>
@@ -35750,6 +35981,7 @@
                   <a:srgbClr val="1B3B6F"/>
                 </a:solidFill>
                 <a:latin typeface="Amiri" pitchFamily="2" charset="-78"/>
+                <a:ea typeface="Amiri" pitchFamily="2" charset="-78"/>
                 <a:cs typeface="Amiri" pitchFamily="2" charset="-78"/>
               </a:rPr>
               <a:t>أَوْلَادُهَا</a:t>
@@ -35853,6 +36085,7 @@
                   <a:srgbClr val="1B3B6F"/>
                 </a:solidFill>
                 <a:latin typeface="Amiri" pitchFamily="2" charset="-78"/>
+                <a:ea typeface="Amiri" pitchFamily="2" charset="-78"/>
                 <a:cs typeface="Amiri" pitchFamily="2" charset="-78"/>
               </a:rPr>
               <a:t>أَوْلَادُهُ</a:t>
@@ -36118,6 +36351,7 @@
                   <a:srgbClr val="1B3B6F"/>
                 </a:solidFill>
                 <a:latin typeface="Amiri" pitchFamily="2" charset="-78"/>
+                <a:ea typeface="Amiri" pitchFamily="2" charset="-78"/>
                 <a:cs typeface="Amiri" pitchFamily="2" charset="-78"/>
               </a:rPr>
               <a:t>مُرَحِّبٌ</a:t>
@@ -36275,6 +36509,7 @@
                   <a:srgbClr val="1B3B6F"/>
                 </a:solidFill>
                 <a:latin typeface="Amiri" pitchFamily="2" charset="-78"/>
+                <a:ea typeface="Amiri" pitchFamily="2" charset="-78"/>
                 <a:cs typeface="Amiri" pitchFamily="2" charset="-78"/>
               </a:rPr>
               <a:t>مُرَحِّبُونَ</a:t>
@@ -36378,6 +36613,7 @@
                   <a:srgbClr val="1B3B6F"/>
                 </a:solidFill>
                 <a:latin typeface="Amiri" pitchFamily="2" charset="-78"/>
+                <a:ea typeface="Amiri" pitchFamily="2" charset="-78"/>
                 <a:cs typeface="Amiri" pitchFamily="2" charset="-78"/>
               </a:rPr>
               <a:t>مُرَحِّبَةٌ</a:t>
@@ -36481,6 +36717,7 @@
                   <a:srgbClr val="1B3B6F"/>
                 </a:solidFill>
                 <a:latin typeface="Amiri" pitchFamily="2" charset="-78"/>
+                <a:ea typeface="Amiri" pitchFamily="2" charset="-78"/>
                 <a:cs typeface="Amiri" pitchFamily="2" charset="-78"/>
               </a:rPr>
               <a:t>مُرَحِّبٌ</a:t>
@@ -36614,6 +36851,7 @@
                   <a:srgbClr val="D4AF37"/>
                 </a:solidFill>
                 <a:latin typeface="Amiri" pitchFamily="2" charset="-78"/>
+                <a:ea typeface="Amiri" pitchFamily="2" charset="-78"/>
                 <a:cs typeface="Amiri" pitchFamily="2" charset="-78"/>
               </a:rPr>
               <a:t>م</a:t>
@@ -36934,6 +37172,7 @@
                   <a:srgbClr val="8A6D1E"/>
                 </a:solidFill>
                 <a:latin typeface="Amiri" pitchFamily="2" charset="-78"/>
+                <a:ea typeface="Amiri" pitchFamily="2" charset="-78"/>
                 <a:cs typeface="Amiri" pitchFamily="2" charset="-78"/>
               </a:rPr>
               <a:t>أَهْلًا بِكُمْ!</a:t>
@@ -37237,6 +37476,7 @@
                   <a:srgbClr val="1B3B6F"/>
                 </a:solidFill>
                 <a:latin typeface="Amiri" pitchFamily="2" charset="-78"/>
+                <a:ea typeface="Amiri" pitchFamily="2" charset="-78"/>
                 <a:cs typeface="Amiri" pitchFamily="2" charset="-78"/>
               </a:rPr>
               <a:t>أَهْلًا وَسَهْلًا بِكُمْ</a:t>
@@ -37394,6 +37634,7 @@
                   <a:srgbClr val="1B3B6F"/>
                 </a:solidFill>
                 <a:latin typeface="Amiri" pitchFamily="2" charset="-78"/>
+                <a:ea typeface="Amiri" pitchFamily="2" charset="-78"/>
                 <a:cs typeface="Amiri" pitchFamily="2" charset="-78"/>
               </a:rPr>
               <a:t>بِكِ</a:t>
@@ -37497,6 +37738,7 @@
                   <a:srgbClr val="1B3B6F"/>
                 </a:solidFill>
                 <a:latin typeface="Amiri" pitchFamily="2" charset="-78"/>
+                <a:ea typeface="Amiri" pitchFamily="2" charset="-78"/>
                 <a:cs typeface="Amiri" pitchFamily="2" charset="-78"/>
               </a:rPr>
               <a:t>بِكَ</a:t>
@@ -37762,6 +38004,7 @@
                   <a:srgbClr val="1B3B6F"/>
                 </a:solidFill>
                 <a:latin typeface="Amiri" pitchFamily="2" charset="-78"/>
+                <a:ea typeface="Amiri" pitchFamily="2" charset="-78"/>
                 <a:cs typeface="Amiri" pitchFamily="2" charset="-78"/>
               </a:rPr>
               <a:t>نَتَعَرَّفُ عَلَى …</a:t>
@@ -37919,6 +38162,7 @@
                   <a:srgbClr val="1B3B6F"/>
                 </a:solidFill>
                 <a:latin typeface="Amiri" pitchFamily="2" charset="-78"/>
+                <a:ea typeface="Amiri" pitchFamily="2" charset="-78"/>
                 <a:cs typeface="Amiri" pitchFamily="2" charset="-78"/>
               </a:rPr>
               <a:t>تَعَرَّفْنَا</a:t>
@@ -38022,6 +38266,7 @@
                   <a:srgbClr val="1B3B6F"/>
                 </a:solidFill>
                 <a:latin typeface="Amiri" pitchFamily="2" charset="-78"/>
+                <a:ea typeface="Amiri" pitchFamily="2" charset="-78"/>
                 <a:cs typeface="Amiri" pitchFamily="2" charset="-78"/>
               </a:rPr>
               <a:t>أَتَعَرَّفُ</a:t>
@@ -38287,6 +38532,7 @@
                   <a:srgbClr val="1B3B6F"/>
                 </a:solidFill>
                 <a:latin typeface="Amiri" pitchFamily="2" charset="-78"/>
+                <a:ea typeface="Amiri" pitchFamily="2" charset="-78"/>
                 <a:cs typeface="Amiri" pitchFamily="2" charset="-78"/>
               </a:rPr>
               <a:t>يُشْبِهُ</a:t>
@@ -38444,6 +38690,7 @@
                   <a:srgbClr val="1B3B6F"/>
                 </a:solidFill>
                 <a:latin typeface="Amiri" pitchFamily="2" charset="-78"/>
+                <a:ea typeface="Amiri" pitchFamily="2" charset="-78"/>
                 <a:cs typeface="Amiri" pitchFamily="2" charset="-78"/>
               </a:rPr>
               <a:t>يُشْبِهُونَ</a:t>
@@ -38547,6 +38794,7 @@
                   <a:srgbClr val="1B3B6F"/>
                 </a:solidFill>
                 <a:latin typeface="Amiri" pitchFamily="2" charset="-78"/>
+                <a:ea typeface="Amiri" pitchFamily="2" charset="-78"/>
                 <a:cs typeface="Amiri" pitchFamily="2" charset="-78"/>
               </a:rPr>
               <a:t>تُشْبِهُ</a:t>
@@ -38812,6 +39060,7 @@
                   <a:srgbClr val="1B3B6F"/>
                 </a:solidFill>
                 <a:latin typeface="Amiri" pitchFamily="2" charset="-78"/>
+                <a:ea typeface="Amiri" pitchFamily="2" charset="-78"/>
                 <a:cs typeface="Amiri" pitchFamily="2" charset="-78"/>
               </a:rPr>
               <a:t>لَطِيفٌ</a:t>
@@ -38969,6 +39218,7 @@
                   <a:srgbClr val="1B3B6F"/>
                 </a:solidFill>
                 <a:latin typeface="Amiri" pitchFamily="2" charset="-78"/>
+                <a:ea typeface="Amiri" pitchFamily="2" charset="-78"/>
                 <a:cs typeface="Amiri" pitchFamily="2" charset="-78"/>
               </a:rPr>
               <a:t>لُطَفَاءُ</a:t>
@@ -39072,6 +39322,7 @@
                   <a:srgbClr val="1B3B6F"/>
                 </a:solidFill>
                 <a:latin typeface="Amiri" pitchFamily="2" charset="-78"/>
+                <a:ea typeface="Amiri" pitchFamily="2" charset="-78"/>
                 <a:cs typeface="Amiri" pitchFamily="2" charset="-78"/>
               </a:rPr>
               <a:t>لَطِيفَةٌ</a:t>
@@ -39175,6 +39426,7 @@
                   <a:srgbClr val="1B3B6F"/>
                 </a:solidFill>
                 <a:latin typeface="Amiri" pitchFamily="2" charset="-78"/>
+                <a:ea typeface="Amiri" pitchFamily="2" charset="-78"/>
                 <a:cs typeface="Amiri" pitchFamily="2" charset="-78"/>
               </a:rPr>
               <a:t>لَطِيفٌ</a:t>
@@ -39440,6 +39692,7 @@
                   <a:srgbClr val="1B3B6F"/>
                 </a:solidFill>
                 <a:latin typeface="Amiri" pitchFamily="2" charset="-78"/>
+                <a:ea typeface="Amiri" pitchFamily="2" charset="-78"/>
                 <a:cs typeface="Amiri" pitchFamily="2" charset="-78"/>
               </a:rPr>
               <a:t>مُسَاعَدَةٌ</a:t>
@@ -39597,6 +39850,7 @@
                   <a:srgbClr val="1B3B6F"/>
                 </a:solidFill>
                 <a:latin typeface="Amiri" pitchFamily="2" charset="-78"/>
+                <a:ea typeface="Amiri" pitchFamily="2" charset="-78"/>
                 <a:cs typeface="Amiri" pitchFamily="2" charset="-78"/>
               </a:rPr>
               <a:t>هَلْ أُسَاعِدُكُمْ؟</a:t>
@@ -39700,6 +39954,7 @@
                   <a:srgbClr val="1B3B6F"/>
                 </a:solidFill>
                 <a:latin typeface="Amiri" pitchFamily="2" charset="-78"/>
+                <a:ea typeface="Amiri" pitchFamily="2" charset="-78"/>
                 <a:cs typeface="Amiri" pitchFamily="2" charset="-78"/>
               </a:rPr>
               <a:t>أُسَاعِدُ</a:t>
@@ -39965,6 +40220,7 @@
                   <a:srgbClr val="1B3B6F"/>
                 </a:solidFill>
                 <a:latin typeface="Amiri" pitchFamily="2" charset="-78"/>
+                <a:ea typeface="Amiri" pitchFamily="2" charset="-78"/>
                 <a:cs typeface="Amiri" pitchFamily="2" charset="-78"/>
               </a:rPr>
               <a:t>تَفَضَّلُوا</a:t>
@@ -40122,6 +40378,7 @@
                   <a:srgbClr val="1B3B6F"/>
                 </a:solidFill>
                 <a:latin typeface="Amiri" pitchFamily="2" charset="-78"/>
+                <a:ea typeface="Amiri" pitchFamily="2" charset="-78"/>
                 <a:cs typeface="Amiri" pitchFamily="2" charset="-78"/>
               </a:rPr>
               <a:t>تَفَضَّلِي</a:t>
@@ -40225,6 +40482,7 @@
                   <a:srgbClr val="1B3B6F"/>
                 </a:solidFill>
                 <a:latin typeface="Amiri" pitchFamily="2" charset="-78"/>
+                <a:ea typeface="Amiri" pitchFamily="2" charset="-78"/>
                 <a:cs typeface="Amiri" pitchFamily="2" charset="-78"/>
               </a:rPr>
               <a:t>تَفَضَّلْ</a:t>
@@ -40358,6 +40616,7 @@
                   <a:srgbClr val="D4AF37"/>
                 </a:solidFill>
                 <a:latin typeface="Amiri" pitchFamily="2" charset="-78"/>
+                <a:ea typeface="Amiri" pitchFamily="2" charset="-78"/>
                 <a:cs typeface="Amiri" pitchFamily="2" charset="-78"/>
               </a:rPr>
               <a:t>م</a:t>
@@ -40678,6 +40937,7 @@
                   <a:srgbClr val="8A6D1E"/>
                 </a:solidFill>
                 <a:latin typeface="Amiri" pitchFamily="2" charset="-78"/>
+                <a:ea typeface="Amiri" pitchFamily="2" charset="-78"/>
                 <a:cs typeface="Amiri" pitchFamily="2" charset="-78"/>
               </a:rPr>
               <a:t>فِي الغُرَفِ</a:t>
@@ -41854,6 +42114,7 @@
                   <a:srgbClr val="1B3B6F"/>
                 </a:solidFill>
                 <a:latin typeface="Amiri" pitchFamily="2" charset="-78"/>
+                <a:ea typeface="Amiri" pitchFamily="2" charset="-78"/>
                 <a:cs typeface="Amiri" pitchFamily="2" charset="-78"/>
               </a:rPr>
               <a:t>دَوْرُكَ!</a:t>
@@ -41930,6 +42191,7 @@
                   <a:srgbClr val="1B3B6F"/>
                 </a:solidFill>
                 <a:latin typeface="Amiri" pitchFamily="2" charset="-78"/>
+                <a:ea typeface="Amiri" pitchFamily="2" charset="-78"/>
                 <a:cs typeface="Amiri" pitchFamily="2" charset="-78"/>
               </a:rPr>
               <a:t>أَحْسَنْتَ! / أَحْسَنْتِ!</a:t>
@@ -42006,6 +42268,7 @@
                   <a:srgbClr val="1B3B6F"/>
                 </a:solidFill>
                 <a:latin typeface="Amiri" pitchFamily="2" charset="-78"/>
+                <a:ea typeface="Amiri" pitchFamily="2" charset="-78"/>
                 <a:cs typeface="Amiri" pitchFamily="2" charset="-78"/>
               </a:rPr>
               <a:t>تَكَلَّمْ أَكْثَرَ، مِنْ فَضْلِكَ</a:t>
@@ -42082,6 +42345,7 @@
                   <a:srgbClr val="1B3B6F"/>
                 </a:solidFill>
                 <a:latin typeface="Amiri" pitchFamily="2" charset="-78"/>
+                <a:ea typeface="Amiri" pitchFamily="2" charset="-78"/>
                 <a:cs typeface="Amiri" pitchFamily="2" charset="-78"/>
               </a:rPr>
               <a:t>لِمَاذَا؟</a:t>
@@ -42253,6 +42517,7 @@
                   <a:srgbClr val="D4AF37"/>
                 </a:solidFill>
                 <a:latin typeface="Amiri" pitchFamily="2" charset="-78"/>
+                <a:ea typeface="Amiri" pitchFamily="2" charset="-78"/>
                 <a:cs typeface="Amiri" pitchFamily="2" charset="-78"/>
               </a:rPr>
               <a:t>م</a:t>
@@ -42573,6 +42838,7 @@
                   <a:srgbClr val="8A6D1E"/>
                 </a:solidFill>
                 <a:latin typeface="Amiri" pitchFamily="2" charset="-78"/>
+                <a:ea typeface="Amiri" pitchFamily="2" charset="-78"/>
                 <a:cs typeface="Amiri" pitchFamily="2" charset="-78"/>
               </a:rPr>
               <a:t>جَارٌ جَدِيدٌ</a:t>
@@ -42853,6 +43119,7 @@
                   <a:srgbClr val="1B3B6F"/>
                 </a:solidFill>
                 <a:latin typeface="Amiri" pitchFamily="2" charset="-78"/>
+                <a:ea typeface="Amiri" pitchFamily="2" charset="-78"/>
                 <a:cs typeface="Amiri" pitchFamily="2" charset="-78"/>
               </a:rPr>
               <a:t>أَهْلًا وَسَهْلًا بِكُمْ! أَنَا …</a:t>
@@ -42929,6 +43196,7 @@
                   <a:srgbClr val="1B3B6F"/>
                 </a:solidFill>
                 <a:latin typeface="Amiri" pitchFamily="2" charset="-78"/>
+                <a:ea typeface="Amiri" pitchFamily="2" charset="-78"/>
                 <a:cs typeface="Amiri" pitchFamily="2" charset="-78"/>
               </a:rPr>
               <a:t>مَرْحَبًا، نَحْنُ الجِيرَانُ الجُدُدُ.</a:t>
@@ -43097,6 +43365,7 @@
                   <a:srgbClr val="1B3B6F"/>
                 </a:solidFill>
                 <a:latin typeface="Amiri" pitchFamily="2" charset="-78"/>
+                <a:ea typeface="Amiri" pitchFamily="2" charset="-78"/>
                 <a:cs typeface="Amiri" pitchFamily="2" charset="-78"/>
               </a:rPr>
               <a:t>أَسْكُنُ مَعَ … وَ…</a:t>
@@ -43173,6 +43442,7 @@
                   <a:srgbClr val="1B3B6F"/>
                 </a:solidFill>
                 <a:latin typeface="Amiri" pitchFamily="2" charset="-78"/>
+                <a:ea typeface="Amiri" pitchFamily="2" charset="-78"/>
                 <a:cs typeface="Amiri" pitchFamily="2" charset="-78"/>
               </a:rPr>
               <a:t>مَنْ يَسْكُنُ مَعَكَ؟</a:t>
@@ -43341,6 +43611,7 @@
                   <a:srgbClr val="1B3B6F"/>
                 </a:solidFill>
                 <a:latin typeface="Amiri" pitchFamily="2" charset="-78"/>
+                <a:ea typeface="Amiri" pitchFamily="2" charset="-78"/>
                 <a:cs typeface="Amiri" pitchFamily="2" charset="-78"/>
               </a:rPr>
               <a:t>نَعَمْ، المَسْجِدُ … بِجَانِبِ …</a:t>
@@ -43417,6 +43688,7 @@
                   <a:srgbClr val="1B3B6F"/>
                 </a:solidFill>
                 <a:latin typeface="Amiri" pitchFamily="2" charset="-78"/>
+                <a:ea typeface="Amiri" pitchFamily="2" charset="-78"/>
                 <a:cs typeface="Amiri" pitchFamily="2" charset="-78"/>
               </a:rPr>
               <a:t>هَلْ يُوجَدُ مَسْجِدٌ قَرِيبٌ؟</a:t>
@@ -43585,6 +43857,7 @@
                   <a:srgbClr val="1B3B6F"/>
                 </a:solidFill>
                 <a:latin typeface="Amiri" pitchFamily="2" charset="-78"/>
+                <a:ea typeface="Amiri" pitchFamily="2" charset="-78"/>
                 <a:cs typeface="Amiri" pitchFamily="2" charset="-78"/>
               </a:rPr>
               <a:t>رَائِعٌ! نَسْتَطِيعُ أَنْ …</a:t>
@@ -43661,6 +43934,7 @@
                   <a:srgbClr val="1B3B6F"/>
                 </a:solidFill>
                 <a:latin typeface="Amiri" pitchFamily="2" charset="-78"/>
+                <a:ea typeface="Amiri" pitchFamily="2" charset="-78"/>
                 <a:cs typeface="Amiri" pitchFamily="2" charset="-78"/>
               </a:rPr>
               <a:t>ابْنِي عُمْرُهُ أَرْبَعَ عَشْرَةَ سَنَةً، وَيُحِبُّ كُرَةَ القَدَمِ.</a:t>
@@ -43829,6 +44103,7 @@
                   <a:srgbClr val="1B3B6F"/>
                 </a:solidFill>
                 <a:latin typeface="Amiri" pitchFamily="2" charset="-78"/>
+                <a:ea typeface="Amiri" pitchFamily="2" charset="-78"/>
                 <a:cs typeface="Amiri" pitchFamily="2" charset="-78"/>
               </a:rPr>
               <a:t>نَعَمْ، لِأَنَّهُ …</a:t>
@@ -43905,6 +44180,7 @@
                   <a:srgbClr val="1B3B6F"/>
                 </a:solidFill>
                 <a:latin typeface="Amiri" pitchFamily="2" charset="-78"/>
+                <a:ea typeface="Amiri" pitchFamily="2" charset="-78"/>
                 <a:cs typeface="Amiri" pitchFamily="2" charset="-78"/>
               </a:rPr>
               <a:t>هَلْ تُحِبُّ هٰذَا الشَّارِعَ؟</a:t>
@@ -44179,6 +44455,7 @@
                   <a:srgbClr val="D4AF37"/>
                 </a:solidFill>
                 <a:latin typeface="Amiri" pitchFamily="2" charset="-78"/>
+                <a:ea typeface="Amiri" pitchFamily="2" charset="-78"/>
                 <a:cs typeface="Amiri" pitchFamily="2" charset="-78"/>
               </a:rPr>
               <a:t>م</a:t>
@@ -44499,6 +44776,7 @@
                   <a:srgbClr val="8A6D1E"/>
                 </a:solidFill>
                 <a:latin typeface="Amiri" pitchFamily="2" charset="-78"/>
+                <a:ea typeface="Amiri" pitchFamily="2" charset="-78"/>
                 <a:cs typeface="Amiri" pitchFamily="2" charset="-78"/>
               </a:rPr>
               <a:t>نُسَاعِدُ الجِيرَانَ</a:t>
@@ -44779,6 +45057,7 @@
                   <a:srgbClr val="1B3B6F"/>
                 </a:solidFill>
                 <a:latin typeface="Amiri" pitchFamily="2" charset="-78"/>
+                <a:ea typeface="Amiri" pitchFamily="2" charset="-78"/>
                 <a:cs typeface="Amiri" pitchFamily="2" charset="-78"/>
               </a:rPr>
               <a:t>نَضَعُهَا فِي … أَمَامَ …</a:t>
@@ -44855,6 +45134,7 @@
                   <a:srgbClr val="1B3B6F"/>
                 </a:solidFill>
                 <a:latin typeface="Amiri" pitchFamily="2" charset="-78"/>
+                <a:ea typeface="Amiri" pitchFamily="2" charset="-78"/>
                 <a:cs typeface="Amiri" pitchFamily="2" charset="-78"/>
               </a:rPr>
               <a:t>شُكْرًا لِأَنَّكَ جِئْتَ! أَيْنَ نَضَعُ هٰذِهِ الكَنَبَةَ؟</a:t>
@@ -45023,6 +45303,7 @@
                   <a:srgbClr val="1B3B6F"/>
                 </a:solidFill>
                 <a:latin typeface="Amiri" pitchFamily="2" charset="-78"/>
+                <a:ea typeface="Amiri" pitchFamily="2" charset="-78"/>
                 <a:cs typeface="Amiri" pitchFamily="2" charset="-78"/>
               </a:rPr>
               <a:t>هِيَ ثَقِيلَةٌ … نَحْمِلُهَا إِلَى …</a:t>
@@ -45099,6 +45380,7 @@
                   <a:srgbClr val="1B3B6F"/>
                 </a:solidFill>
                 <a:latin typeface="Amiri" pitchFamily="2" charset="-78"/>
+                <a:ea typeface="Amiri" pitchFamily="2" charset="-78"/>
                 <a:cs typeface="Amiri" pitchFamily="2" charset="-78"/>
               </a:rPr>
               <a:t>وَهٰذِهِ الخِزَانَةُ الكَبِيرَةُ؟</a:t>
@@ -45267,6 +45549,7 @@
                   <a:srgbClr val="1B3B6F"/>
                 </a:solidFill>
                 <a:latin typeface="Amiri" pitchFamily="2" charset="-78"/>
+                <a:ea typeface="Amiri" pitchFamily="2" charset="-78"/>
                 <a:cs typeface="Amiri" pitchFamily="2" charset="-78"/>
               </a:rPr>
               <a:t>اللَّوْنُ … لٰكِنَّ … أَفْضَلُ</a:t>
@@ -45343,6 +45626,7 @@
                   <a:srgbClr val="1B3B6F"/>
                 </a:solidFill>
                 <a:latin typeface="Amiri" pitchFamily="2" charset="-78"/>
+                <a:ea typeface="Amiri" pitchFamily="2" charset="-78"/>
                 <a:cs typeface="Amiri" pitchFamily="2" charset="-78"/>
               </a:rPr>
               <a:t>مَا رَأْيُكَ فِي لَوْنِ الجُدْرَانِ؟</a:t>
@@ -45446,6 +45730,7 @@
                   <a:srgbClr val="1B3B6F"/>
                 </a:solidFill>
                 <a:latin typeface="Amiri" pitchFamily="2" charset="-78"/>
+                <a:ea typeface="Amiri" pitchFamily="2" charset="-78"/>
                 <a:cs typeface="Amiri" pitchFamily="2" charset="-78"/>
               </a:rPr>
               <a:t>مَا المُشْكِلَةُ؟ هَلْ …؟</a:t>
@@ -45522,6 +45807,7 @@
                   <a:srgbClr val="1B3B6F"/>
                 </a:solidFill>
                 <a:latin typeface="Amiri" pitchFamily="2" charset="-78"/>
+                <a:ea typeface="Amiri" pitchFamily="2" charset="-78"/>
                 <a:cs typeface="Amiri" pitchFamily="2" charset="-78"/>
               </a:rPr>
               <a:t>… الثَّلَّاجَةُ لَا تَعْمَلُ!</a:t>
@@ -45625,6 +45911,7 @@
                   <a:srgbClr val="1B3B6F"/>
                 </a:solidFill>
                 <a:latin typeface="Amiri" pitchFamily="2" charset="-78"/>
+                <a:ea typeface="Amiri" pitchFamily="2" charset="-78"/>
                 <a:cs typeface="Amiri" pitchFamily="2" charset="-78"/>
               </a:rPr>
               <a:t>بِكُلِّ سُرُورٍ / شُكْرًا …</a:t>
@@ -45701,6 +45988,7 @@
                   <a:srgbClr val="1B3B6F"/>
                 </a:solidFill>
                 <a:latin typeface="Amiri" pitchFamily="2" charset="-78"/>
+                <a:ea typeface="Amiri" pitchFamily="2" charset="-78"/>
                 <a:cs typeface="Amiri" pitchFamily="2" charset="-78"/>
               </a:rPr>
               <a:t>تَعَالَ نَشْرَبِ الشَّايَ!</a:t>
@@ -45875,13 +46163,9 @@
     <a:fontScheme name="Office">
       <a:majorFont>
         <a:latin typeface="Calibri Light" panose="020F0302020204030204"/>
-        <a:ea typeface=""/>
-        <a:cs typeface=""/>
-        <a:font script="Jpan" typeface="游ゴシック Light"/>
-        <a:font script="Hang" typeface="맑은 고딕"/>
-        <a:font script="Hans" typeface="等线 Light"/>
-        <a:font script="Hant" typeface="新細明體"/>
-        <a:font script="Arab" typeface="Times New Roman"/>
+        <a:ea typeface="Amiri" pitchFamily="2" charset="-78"/>
+        <a:cs typeface="Amiri" pitchFamily="2" charset="-78"/>
+        <a:font script="Arab" typeface="Amiri"/>
         <a:font script="Hebr" typeface="Times New Roman"/>
         <a:font script="Thai" typeface="Angsana New"/>
         <a:font script="Ethi" typeface="Nyala"/>
@@ -45927,13 +46211,9 @@
       </a:majorFont>
       <a:minorFont>
         <a:latin typeface="Calibri" panose="020F0502020204030204"/>
-        <a:ea typeface=""/>
-        <a:cs typeface=""/>
-        <a:font script="Jpan" typeface="游ゴシック"/>
-        <a:font script="Hang" typeface="맑은 고딕"/>
-        <a:font script="Hans" typeface="等线"/>
-        <a:font script="Hant" typeface="新細明體"/>
-        <a:font script="Arab" typeface="Arial"/>
+        <a:ea typeface="Amiri" pitchFamily="2" charset="-78"/>
+        <a:cs typeface="Amiri" pitchFamily="2" charset="-78"/>
+        <a:font script="Arab" typeface="Amiri"/>
         <a:font script="Hebr" typeface="Arial"/>
         <a:font script="Thai" typeface="Cordia New"/>
         <a:font script="Ethi" typeface="Nyala"/>
